--- a/docs/project-management/Trading_Platform_Architecture.pptx
+++ b/docs/project-management/Trading_Platform_Architecture.pptx
@@ -6,13 +6,16 @@
   </p:sldMasterIdLst>
   <p:sldIdLst>
     <p:sldId id="256" r:id="rId7"/>
-    <p:sldId id="257" r:id="rId8"/>
-    <p:sldId id="258" r:id="rId9"/>
-    <p:sldId id="259" r:id="rId10"/>
-    <p:sldId id="260" r:id="rId11"/>
-    <p:sldId id="261" r:id="rId12"/>
-    <p:sldId id="262" r:id="rId13"/>
-    <p:sldId id="263" r:id="rId14"/>
+    <p:sldId id="257" r:id="rId9"/>
+    <p:sldId id="258" r:id="rId10"/>
+    <p:sldId id="259" r:id="rId11"/>
+    <p:sldId id="260" r:id="rId12"/>
+    <p:sldId id="261" r:id="rId13"/>
+    <p:sldId id="262" r:id="rId14"/>
+    <p:sldId id="263" r:id="rId15"/>
+    <p:sldId id="264" r:id="rId16"/>
+    <p:sldId id="265" r:id="rId17"/>
+    <p:sldId id="266" r:id="rId18"/>
   </p:sldIdLst>
   <p:sldSz cx="12191695" cy="6858000" type="screen4x3"/>
   <p:notesSz cx="6858000" cy="9144000"/>
@@ -112,6 +115,1126 @@
     </a:lvl9pPr>
   </p:defaultTextStyle>
 </p:presentation>
+</file>
+
+<file path=ppt/notesMasters/notesMaster1.xml><?xml version="1.0" encoding="utf-8"?>
+<p:notesMaster xmlns:a="http://schemas.openxmlformats.org/drawingml/2006/main" xmlns:p="http://schemas.openxmlformats.org/presentationml/2006/main" xmlns:r="http://schemas.openxmlformats.org/officeDocument/2006/relationships">
+  <p:cSld>
+    <p:bg>
+      <p:bgRef idx="1001">
+        <a:schemeClr val="bg1"/>
+      </p:bgRef>
+    </p:bg>
+    <p:spTree>
+      <p:nvGrpSpPr>
+        <p:cNvPr id="1" name=""/>
+        <p:cNvGrpSpPr/>
+        <p:nvPr/>
+      </p:nvGrpSpPr>
+      <p:grpSpPr>
+        <a:xfrm>
+          <a:off x="0" y="0"/>
+          <a:ext cx="0" cy="0"/>
+          <a:chOff x="0" y="0"/>
+          <a:chExt cx="0" cy="0"/>
+        </a:xfrm>
+      </p:grpSpPr>
+      <p:sp>
+        <p:nvSpPr>
+          <p:cNvPr id="2" name="Header Placeholder 1"/>
+          <p:cNvSpPr>
+            <a:spLocks noGrp="1"/>
+          </p:cNvSpPr>
+          <p:nvPr>
+            <p:ph type="hdr" sz="quarter"/>
+          </p:nvPr>
+        </p:nvSpPr>
+        <p:spPr>
+          <a:xfrm>
+            <a:off x="0" y="0"/>
+            <a:ext cx="2971800" cy="457200"/>
+          </a:xfrm>
+          <a:prstGeom prst="rect">
+            <a:avLst/>
+          </a:prstGeom>
+        </p:spPr>
+        <p:txBody>
+          <a:bodyPr vert="horz" lIns="91440" tIns="45720" rIns="91440" bIns="45720" rtlCol="0"/>
+          <a:lstStyle>
+            <a:lvl1pPr algn="l">
+              <a:defRPr sz="1200"/>
+            </a:lvl1pPr>
+          </a:lstStyle>
+          <a:p>
+            <a:endParaRPr lang="en-US"/>
+          </a:p>
+        </p:txBody>
+      </p:sp>
+      <p:sp>
+        <p:nvSpPr>
+          <p:cNvPr id="3" name="Date Placeholder 2"/>
+          <p:cNvSpPr>
+            <a:spLocks noGrp="1"/>
+          </p:cNvSpPr>
+          <p:nvPr>
+            <p:ph type="dt" idx="1"/>
+          </p:nvPr>
+        </p:nvSpPr>
+        <p:spPr>
+          <a:xfrm>
+            <a:off x="3884613" y="0"/>
+            <a:ext cx="2971800" cy="457200"/>
+          </a:xfrm>
+          <a:prstGeom prst="rect">
+            <a:avLst/>
+          </a:prstGeom>
+        </p:spPr>
+        <p:txBody>
+          <a:bodyPr vert="horz" lIns="91440" tIns="45720" rIns="91440" bIns="45720" rtlCol="0"/>
+          <a:lstStyle>
+            <a:lvl1pPr algn="r">
+              <a:defRPr sz="1200"/>
+            </a:lvl1pPr>
+          </a:lstStyle>
+          <a:p>
+            <a:fld id="{0F89C1C7-3DCD-1040-A9CF-14679D8B5DDD}" type="datetimeFigureOut">
+              <a:rPr lang="en-US" smtClean="0"/>
+              <a:t>10/17/16</a:t>
+            </a:fld>
+            <a:endParaRPr lang="en-US"/>
+          </a:p>
+        </p:txBody>
+      </p:sp>
+      <p:sp>
+        <p:nvSpPr>
+          <p:cNvPr id="4" name="Slide Image Placeholder 3"/>
+          <p:cNvSpPr>
+            <a:spLocks noGrp="1" noRot="1" noChangeAspect="1"/>
+          </p:cNvSpPr>
+          <p:nvPr>
+            <p:ph type="sldImg" idx="2"/>
+          </p:nvPr>
+        </p:nvSpPr>
+        <p:spPr>
+          <a:xfrm>
+            <a:off x="1143000" y="685800"/>
+            <a:ext cx="4572000" cy="3429000"/>
+          </a:xfrm>
+          <a:prstGeom prst="rect">
+            <a:avLst/>
+          </a:prstGeom>
+          <a:noFill/>
+          <a:ln w="12700">
+            <a:solidFill>
+              <a:prstClr val="black"/>
+            </a:solidFill>
+          </a:ln>
+        </p:spPr>
+        <p:txBody>
+          <a:bodyPr vert="horz" lIns="91440" tIns="45720" rIns="91440" bIns="45720" rtlCol="0" anchor="ctr"/>
+          <a:lstStyle/>
+          <a:p>
+            <a:endParaRPr lang="en-US"/>
+          </a:p>
+        </p:txBody>
+      </p:sp>
+      <p:sp>
+        <p:nvSpPr>
+          <p:cNvPr id="5" name="Notes Placeholder 4"/>
+          <p:cNvSpPr>
+            <a:spLocks noGrp="1"/>
+          </p:cNvSpPr>
+          <p:nvPr>
+            <p:ph type="body" sz="quarter" idx="3"/>
+          </p:nvPr>
+        </p:nvSpPr>
+        <p:spPr>
+          <a:xfrm>
+            <a:off x="685800" y="4343400"/>
+            <a:ext cx="5486400" cy="4114800"/>
+          </a:xfrm>
+          <a:prstGeom prst="rect">
+            <a:avLst/>
+          </a:prstGeom>
+        </p:spPr>
+        <p:txBody>
+          <a:bodyPr vert="horz" lIns="91440" tIns="45720" rIns="91440" bIns="45720" rtlCol="0"/>
+          <a:lstStyle/>
+          <a:p>
+            <a:pPr lvl="0"/>
+            <a:r>
+              <a:rPr lang="en-US" smtClean="0"/>
+              <a:t>Click to edit Master text styles</a:t>
+            </a:r>
+          </a:p>
+          <a:p>
+            <a:pPr lvl="1"/>
+            <a:r>
+              <a:rPr lang="en-US" smtClean="0"/>
+              <a:t>Second level</a:t>
+            </a:r>
+          </a:p>
+          <a:p>
+            <a:pPr lvl="2"/>
+            <a:r>
+              <a:rPr lang="en-US" smtClean="0"/>
+              <a:t>Third level</a:t>
+            </a:r>
+          </a:p>
+          <a:p>
+            <a:pPr lvl="3"/>
+            <a:r>
+              <a:rPr lang="en-US" smtClean="0"/>
+              <a:t>Fourth level</a:t>
+            </a:r>
+          </a:p>
+          <a:p>
+            <a:pPr lvl="4"/>
+            <a:r>
+              <a:rPr lang="en-US" smtClean="0"/>
+              <a:t>Fifth level</a:t>
+            </a:r>
+            <a:endParaRPr lang="en-US"/>
+          </a:p>
+        </p:txBody>
+      </p:sp>
+      <p:sp>
+        <p:nvSpPr>
+          <p:cNvPr id="6" name="Footer Placeholder 5"/>
+          <p:cNvSpPr>
+            <a:spLocks noGrp="1"/>
+          </p:cNvSpPr>
+          <p:nvPr>
+            <p:ph type="ftr" sz="quarter" idx="4"/>
+          </p:nvPr>
+        </p:nvSpPr>
+        <p:spPr>
+          <a:xfrm>
+            <a:off x="0" y="8685213"/>
+            <a:ext cx="2971800" cy="457200"/>
+          </a:xfrm>
+          <a:prstGeom prst="rect">
+            <a:avLst/>
+          </a:prstGeom>
+        </p:spPr>
+        <p:txBody>
+          <a:bodyPr vert="horz" lIns="91440" tIns="45720" rIns="91440" bIns="45720" rtlCol="0" anchor="b"/>
+          <a:lstStyle>
+            <a:lvl1pPr algn="l">
+              <a:defRPr sz="1200"/>
+            </a:lvl1pPr>
+          </a:lstStyle>
+          <a:p>
+            <a:endParaRPr lang="en-US"/>
+          </a:p>
+        </p:txBody>
+      </p:sp>
+      <p:sp>
+        <p:nvSpPr>
+          <p:cNvPr id="7" name="Slide Number Placeholder 6"/>
+          <p:cNvSpPr>
+            <a:spLocks noGrp="1"/>
+          </p:cNvSpPr>
+          <p:nvPr>
+            <p:ph type="sldNum" sz="quarter" idx="5"/>
+          </p:nvPr>
+        </p:nvSpPr>
+        <p:spPr>
+          <a:xfrm>
+            <a:off x="3884613" y="8685213"/>
+            <a:ext cx="2971800" cy="457200"/>
+          </a:xfrm>
+          <a:prstGeom prst="rect">
+            <a:avLst/>
+          </a:prstGeom>
+        </p:spPr>
+        <p:txBody>
+          <a:bodyPr vert="horz" lIns="91440" tIns="45720" rIns="91440" bIns="45720" rtlCol="0" anchor="b"/>
+          <a:lstStyle>
+            <a:lvl1pPr algn="r">
+              <a:defRPr sz="1200"/>
+            </a:lvl1pPr>
+          </a:lstStyle>
+          <a:p>
+            <a:fld id="{BB5E49A5-4136-284D-997B-48E1D791AD67}" type="slidenum">
+              <a:rPr lang="en-US" smtClean="0"/>
+              <a:t>‹#›</a:t>
+            </a:fld>
+            <a:endParaRPr lang="en-US"/>
+          </a:p>
+        </p:txBody>
+      </p:sp>
+    </p:spTree>
+    <p:extLst>
+      <p:ext uri="{BB962C8B-B14F-4D97-AF65-F5344CB8AC3E}">
+        <p14:creationId xmlns:p14="http://schemas.microsoft.com/office/powerpoint/2010/main" val="2623252185"/>
+      </p:ext>
+    </p:extLst>
+  </p:cSld>
+  <p:clrMap bg1="lt1" tx1="dk1" bg2="lt2" tx2="dk2" accent1="accent1" accent2="accent2" accent3="accent3" accent4="accent4" accent5="accent5" accent6="accent6" hlink="hlink" folHlink="folHlink"/>
+  <p:notesStyle>
+    <a:lvl1pPr marL="0" algn="l" defTabSz="457200" rtl="0" eaLnBrk="1" latinLnBrk="0" hangingPunct="1">
+      <a:defRPr sz="1200" kern="1200">
+        <a:solidFill>
+          <a:schemeClr val="tx1"/>
+        </a:solidFill>
+        <a:latin typeface="+mn-lt"/>
+        <a:ea typeface="+mn-ea"/>
+        <a:cs typeface="+mn-cs"/>
+      </a:defRPr>
+    </a:lvl1pPr>
+    <a:lvl2pPr marL="457200" algn="l" defTabSz="457200" rtl="0" eaLnBrk="1" latinLnBrk="0" hangingPunct="1">
+      <a:defRPr sz="1200" kern="1200">
+        <a:solidFill>
+          <a:schemeClr val="tx1"/>
+        </a:solidFill>
+        <a:latin typeface="+mn-lt"/>
+        <a:ea typeface="+mn-ea"/>
+        <a:cs typeface="+mn-cs"/>
+      </a:defRPr>
+    </a:lvl2pPr>
+    <a:lvl3pPr marL="914400" algn="l" defTabSz="457200" rtl="0" eaLnBrk="1" latinLnBrk="0" hangingPunct="1">
+      <a:defRPr sz="1200" kern="1200">
+        <a:solidFill>
+          <a:schemeClr val="tx1"/>
+        </a:solidFill>
+        <a:latin typeface="+mn-lt"/>
+        <a:ea typeface="+mn-ea"/>
+        <a:cs typeface="+mn-cs"/>
+      </a:defRPr>
+    </a:lvl3pPr>
+    <a:lvl4pPr marL="1371600" algn="l" defTabSz="457200" rtl="0" eaLnBrk="1" latinLnBrk="0" hangingPunct="1">
+      <a:defRPr sz="1200" kern="1200">
+        <a:solidFill>
+          <a:schemeClr val="tx1"/>
+        </a:solidFill>
+        <a:latin typeface="+mn-lt"/>
+        <a:ea typeface="+mn-ea"/>
+        <a:cs typeface="+mn-cs"/>
+      </a:defRPr>
+    </a:lvl4pPr>
+    <a:lvl5pPr marL="1828800" algn="l" defTabSz="457200" rtl="0" eaLnBrk="1" latinLnBrk="0" hangingPunct="1">
+      <a:defRPr sz="1200" kern="1200">
+        <a:solidFill>
+          <a:schemeClr val="tx1"/>
+        </a:solidFill>
+        <a:latin typeface="+mn-lt"/>
+        <a:ea typeface="+mn-ea"/>
+        <a:cs typeface="+mn-cs"/>
+      </a:defRPr>
+    </a:lvl5pPr>
+    <a:lvl6pPr marL="2286000" algn="l" defTabSz="457200" rtl="0" eaLnBrk="1" latinLnBrk="0" hangingPunct="1">
+      <a:defRPr sz="1200" kern="1200">
+        <a:solidFill>
+          <a:schemeClr val="tx1"/>
+        </a:solidFill>
+        <a:latin typeface="+mn-lt"/>
+        <a:ea typeface="+mn-ea"/>
+        <a:cs typeface="+mn-cs"/>
+      </a:defRPr>
+    </a:lvl6pPr>
+    <a:lvl7pPr marL="2743200" algn="l" defTabSz="457200" rtl="0" eaLnBrk="1" latinLnBrk="0" hangingPunct="1">
+      <a:defRPr sz="1200" kern="1200">
+        <a:solidFill>
+          <a:schemeClr val="tx1"/>
+        </a:solidFill>
+        <a:latin typeface="+mn-lt"/>
+        <a:ea typeface="+mn-ea"/>
+        <a:cs typeface="+mn-cs"/>
+      </a:defRPr>
+    </a:lvl7pPr>
+    <a:lvl8pPr marL="3200400" algn="l" defTabSz="457200" rtl="0" eaLnBrk="1" latinLnBrk="0" hangingPunct="1">
+      <a:defRPr sz="1200" kern="1200">
+        <a:solidFill>
+          <a:schemeClr val="tx1"/>
+        </a:solidFill>
+        <a:latin typeface="+mn-lt"/>
+        <a:ea typeface="+mn-ea"/>
+        <a:cs typeface="+mn-cs"/>
+      </a:defRPr>
+    </a:lvl8pPr>
+    <a:lvl9pPr marL="3657600" algn="l" defTabSz="457200" rtl="0" eaLnBrk="1" latinLnBrk="0" hangingPunct="1">
+      <a:defRPr sz="1200" kern="1200">
+        <a:solidFill>
+          <a:schemeClr val="tx1"/>
+        </a:solidFill>
+        <a:latin typeface="+mn-lt"/>
+        <a:ea typeface="+mn-ea"/>
+        <a:cs typeface="+mn-cs"/>
+      </a:defRPr>
+    </a:lvl9pPr>
+  </p:notesStyle>
+</p:notesMaster>
+</file>
+
+<file path=ppt/notesSlides/notesSlide1.xml><?xml version="1.0" encoding="utf-8"?>
+<p:notes xmlns:a="http://schemas.openxmlformats.org/drawingml/2006/main" xmlns:p="http://schemas.openxmlformats.org/presentationml/2006/main" xmlns:r="http://schemas.openxmlformats.org/officeDocument/2006/relationships">
+  <p:cSld>
+    <p:spTree>
+      <p:nvGrpSpPr>
+        <p:cNvPr id="1" name=""/>
+        <p:cNvGrpSpPr/>
+        <p:nvPr/>
+      </p:nvGrpSpPr>
+      <p:grpSpPr>
+        <a:xfrm>
+          <a:off x="0" y="0"/>
+          <a:ext cx="0" cy="0"/>
+          <a:chOff x="0" y="0"/>
+          <a:chExt cx="0" cy="0"/>
+        </a:xfrm>
+      </p:grpSpPr>
+      <p:sp>
+        <p:nvSpPr>
+          <p:cNvPr id="2" name="Slide Image Placeholder 1"/>
+          <p:cNvSpPr>
+            <a:spLocks noGrp="1"/>
+          </p:cNvSpPr>
+          <p:nvPr>
+            <p:ph type="sldImg" idx="2"/>
+          </p:nvPr>
+        </p:nvSpPr>
+        <p:spPr/>
+      </p:sp>
+      <p:sp>
+        <p:nvSpPr>
+          <p:cNvPr id="3" name="Notes Placeholder 2"/>
+          <p:cNvSpPr>
+            <a:spLocks noGrp="1"/>
+          </p:cNvSpPr>
+          <p:nvPr>
+            <p:ph type="body" idx="3" sz="quarter"/>
+          </p:nvPr>
+        </p:nvSpPr>
+        <p:spPr/>
+        <p:txBody>
+          <a:bodyPr/>
+          <a:lstStyle/>
+          <a:p>
+            <a:r>
+              <a:t>TPM perspective: frame this as an evidence-led proof of concept and proposed enterprise delivery plan. Avoid implying Morgan Stanley sponsorship, production use, approvals, or outcomes not evidenced.</a:t>
+            </a:r>
+          </a:p>
+        </p:txBody>
+      </p:sp>
+      <p:sp>
+        <p:nvSpPr>
+          <p:cNvPr id="4" name="Slide Number Placeholder 3"/>
+          <p:cNvSpPr>
+            <a:spLocks noGrp="1"/>
+          </p:cNvSpPr>
+          <p:nvPr>
+            <p:ph type="sldNum" idx="5" sz="quarter"/>
+          </p:nvPr>
+        </p:nvSpPr>
+        <p:spPr/>
+      </p:sp>
+    </p:spTree>
+  </p:cSld>
+  <p:clrMapOvr>
+    <a:masterClrMapping/>
+  </p:clrMapOvr>
+</p:notes>
+</file>
+
+<file path=ppt/notesSlides/notesSlide10.xml><?xml version="1.0" encoding="utf-8"?>
+<p:notes xmlns:a="http://schemas.openxmlformats.org/drawingml/2006/main" xmlns:p="http://schemas.openxmlformats.org/presentationml/2006/main" xmlns:r="http://schemas.openxmlformats.org/officeDocument/2006/relationships">
+  <p:cSld>
+    <p:spTree>
+      <p:nvGrpSpPr>
+        <p:cNvPr id="1" name=""/>
+        <p:cNvGrpSpPr/>
+        <p:nvPr/>
+      </p:nvGrpSpPr>
+      <p:grpSpPr>
+        <a:xfrm>
+          <a:off x="0" y="0"/>
+          <a:ext cx="0" cy="0"/>
+          <a:chOff x="0" y="0"/>
+          <a:chExt cx="0" cy="0"/>
+        </a:xfrm>
+      </p:grpSpPr>
+      <p:sp>
+        <p:nvSpPr>
+          <p:cNvPr id="2" name="Slide Image Placeholder 1"/>
+          <p:cNvSpPr>
+            <a:spLocks noGrp="1"/>
+          </p:cNvSpPr>
+          <p:nvPr>
+            <p:ph type="sldImg" idx="2"/>
+          </p:nvPr>
+        </p:nvSpPr>
+        <p:spPr/>
+      </p:sp>
+      <p:sp>
+        <p:nvSpPr>
+          <p:cNvPr id="3" name="Notes Placeholder 2"/>
+          <p:cNvSpPr>
+            <a:spLocks noGrp="1"/>
+          </p:cNvSpPr>
+          <p:nvPr>
+            <p:ph type="body" idx="3" sz="quarter"/>
+          </p:nvPr>
+        </p:nvSpPr>
+        <p:spPr/>
+        <p:txBody>
+          <a:bodyPr/>
+          <a:lstStyle/>
+          <a:p>
+            <a:r>
+              <a:t>TPM perspective: define evidence and defect thresholds before the test cycle; a failed financial reconciliation is a release blocker until triaged and accepted.</a:t>
+            </a:r>
+          </a:p>
+        </p:txBody>
+      </p:sp>
+      <p:sp>
+        <p:nvSpPr>
+          <p:cNvPr id="4" name="Slide Number Placeholder 3"/>
+          <p:cNvSpPr>
+            <a:spLocks noGrp="1"/>
+          </p:cNvSpPr>
+          <p:nvPr>
+            <p:ph type="sldNum" idx="5" sz="quarter"/>
+          </p:nvPr>
+        </p:nvSpPr>
+        <p:spPr/>
+      </p:sp>
+    </p:spTree>
+  </p:cSld>
+  <p:clrMapOvr>
+    <a:masterClrMapping/>
+  </p:clrMapOvr>
+</p:notes>
+</file>
+
+<file path=ppt/notesSlides/notesSlide11.xml><?xml version="1.0" encoding="utf-8"?>
+<p:notes xmlns:a="http://schemas.openxmlformats.org/drawingml/2006/main" xmlns:p="http://schemas.openxmlformats.org/presentationml/2006/main" xmlns:r="http://schemas.openxmlformats.org/officeDocument/2006/relationships">
+  <p:cSld>
+    <p:spTree>
+      <p:nvGrpSpPr>
+        <p:cNvPr id="1" name=""/>
+        <p:cNvGrpSpPr/>
+        <p:nvPr/>
+      </p:nvGrpSpPr>
+      <p:grpSpPr>
+        <a:xfrm>
+          <a:off x="0" y="0"/>
+          <a:ext cx="0" cy="0"/>
+          <a:chOff x="0" y="0"/>
+          <a:chExt cx="0" cy="0"/>
+        </a:xfrm>
+      </p:grpSpPr>
+      <p:sp>
+        <p:nvSpPr>
+          <p:cNvPr id="2" name="Slide Image Placeholder 1"/>
+          <p:cNvSpPr>
+            <a:spLocks noGrp="1"/>
+          </p:cNvSpPr>
+          <p:nvPr>
+            <p:ph type="sldImg" idx="2"/>
+          </p:nvPr>
+        </p:nvSpPr>
+        <p:spPr/>
+      </p:sp>
+      <p:sp>
+        <p:nvSpPr>
+          <p:cNvPr id="3" name="Notes Placeholder 2"/>
+          <p:cNvSpPr>
+            <a:spLocks noGrp="1"/>
+          </p:cNvSpPr>
+          <p:nvPr>
+            <p:ph type="body" idx="3" sz="quarter"/>
+          </p:nvPr>
+        </p:nvSpPr>
+        <p:spPr/>
+        <p:txBody>
+          <a:bodyPr/>
+          <a:lstStyle/>
+          <a:p>
+            <a:r>
+              <a:t>TPM perspective: assign named control owners before deployment. A grants template or a successful dev run is not evidence of production approval.</a:t>
+            </a:r>
+          </a:p>
+        </p:txBody>
+      </p:sp>
+      <p:sp>
+        <p:nvSpPr>
+          <p:cNvPr id="4" name="Slide Number Placeholder 3"/>
+          <p:cNvSpPr>
+            <a:spLocks noGrp="1"/>
+          </p:cNvSpPr>
+          <p:nvPr>
+            <p:ph type="sldNum" idx="5" sz="quarter"/>
+          </p:nvPr>
+        </p:nvSpPr>
+        <p:spPr/>
+      </p:sp>
+    </p:spTree>
+  </p:cSld>
+  <p:clrMapOvr>
+    <a:masterClrMapping/>
+  </p:clrMapOvr>
+</p:notes>
+</file>
+
+<file path=ppt/notesSlides/notesSlide2.xml><?xml version="1.0" encoding="utf-8"?>
+<p:notes xmlns:a="http://schemas.openxmlformats.org/drawingml/2006/main" xmlns:p="http://schemas.openxmlformats.org/presentationml/2006/main" xmlns:r="http://schemas.openxmlformats.org/officeDocument/2006/relationships">
+  <p:cSld>
+    <p:spTree>
+      <p:nvGrpSpPr>
+        <p:cNvPr id="1" name=""/>
+        <p:cNvGrpSpPr/>
+        <p:nvPr/>
+      </p:nvGrpSpPr>
+      <p:grpSpPr>
+        <a:xfrm>
+          <a:off x="0" y="0"/>
+          <a:ext cx="0" cy="0"/>
+          <a:chOff x="0" y="0"/>
+          <a:chExt cx="0" cy="0"/>
+        </a:xfrm>
+      </p:grpSpPr>
+      <p:sp>
+        <p:nvSpPr>
+          <p:cNvPr id="2" name="Slide Image Placeholder 1"/>
+          <p:cNvSpPr>
+            <a:spLocks noGrp="1"/>
+          </p:cNvSpPr>
+          <p:nvPr>
+            <p:ph type="sldImg" idx="2"/>
+          </p:nvPr>
+        </p:nvSpPr>
+        <p:spPr/>
+      </p:sp>
+      <p:sp>
+        <p:nvSpPr>
+          <p:cNvPr id="3" name="Notes Placeholder 2"/>
+          <p:cNvSpPr>
+            <a:spLocks noGrp="1"/>
+          </p:cNvSpPr>
+          <p:nvPr>
+            <p:ph type="body" idx="3" sz="quarter"/>
+          </p:nvPr>
+        </p:nvSpPr>
+        <p:spPr/>
+        <p:txBody>
+          <a:bodyPr/>
+          <a:lstStyle/>
+          <a:p>
+            <a:r>
+              <a:t>TPM perspective: lead with the business outcome and boundaries. Separate a demonstrated calculation from institutional data rights, control sign-off, and production readiness.</a:t>
+            </a:r>
+          </a:p>
+        </p:txBody>
+      </p:sp>
+      <p:sp>
+        <p:nvSpPr>
+          <p:cNvPr id="4" name="Slide Number Placeholder 3"/>
+          <p:cNvSpPr>
+            <a:spLocks noGrp="1"/>
+          </p:cNvSpPr>
+          <p:nvPr>
+            <p:ph type="sldNum" idx="5" sz="quarter"/>
+          </p:nvPr>
+        </p:nvSpPr>
+        <p:spPr/>
+      </p:sp>
+    </p:spTree>
+  </p:cSld>
+  <p:clrMapOvr>
+    <a:masterClrMapping/>
+  </p:clrMapOvr>
+</p:notes>
+</file>
+
+<file path=ppt/notesSlides/notesSlide3.xml><?xml version="1.0" encoding="utf-8"?>
+<p:notes xmlns:a="http://schemas.openxmlformats.org/drawingml/2006/main" xmlns:p="http://schemas.openxmlformats.org/presentationml/2006/main" xmlns:r="http://schemas.openxmlformats.org/officeDocument/2006/relationships">
+  <p:cSld>
+    <p:spTree>
+      <p:nvGrpSpPr>
+        <p:cNvPr id="1" name=""/>
+        <p:cNvGrpSpPr/>
+        <p:nvPr/>
+      </p:nvGrpSpPr>
+      <p:grpSpPr>
+        <a:xfrm>
+          <a:off x="0" y="0"/>
+          <a:ext cx="0" cy="0"/>
+          <a:chOff x="0" y="0"/>
+          <a:chExt cx="0" cy="0"/>
+        </a:xfrm>
+      </p:grpSpPr>
+      <p:sp>
+        <p:nvSpPr>
+          <p:cNvPr id="2" name="Slide Image Placeholder 1"/>
+          <p:cNvSpPr>
+            <a:spLocks noGrp="1"/>
+          </p:cNvSpPr>
+          <p:nvPr>
+            <p:ph type="sldImg" idx="2"/>
+          </p:nvPr>
+        </p:nvSpPr>
+        <p:spPr/>
+      </p:sp>
+      <p:sp>
+        <p:nvSpPr>
+          <p:cNvPr id="3" name="Notes Placeholder 2"/>
+          <p:cNvSpPr>
+            <a:spLocks noGrp="1"/>
+          </p:cNvSpPr>
+          <p:nvPr>
+            <p:ph type="body" idx="3" sz="quarter"/>
+          </p:nvPr>
+        </p:nvSpPr>
+        <p:spPr/>
+        <p:txBody>
+          <a:bodyPr/>
+          <a:lstStyle/>
+          <a:p>
+            <a:r>
+              <a:t>TPM perspective: identify owners and service contracts as dependencies. Explain that provider selection is a decision gate, not a technical assumption the team can make alone.</a:t>
+            </a:r>
+          </a:p>
+        </p:txBody>
+      </p:sp>
+      <p:sp>
+        <p:nvSpPr>
+          <p:cNvPr id="4" name="Slide Number Placeholder 3"/>
+          <p:cNvSpPr>
+            <a:spLocks noGrp="1"/>
+          </p:cNvSpPr>
+          <p:nvPr>
+            <p:ph type="sldNum" idx="5" sz="quarter"/>
+          </p:nvPr>
+        </p:nvSpPr>
+        <p:spPr/>
+      </p:sp>
+    </p:spTree>
+  </p:cSld>
+  <p:clrMapOvr>
+    <a:masterClrMapping/>
+  </p:clrMapOvr>
+</p:notes>
+</file>
+
+<file path=ppt/notesSlides/notesSlide4.xml><?xml version="1.0" encoding="utf-8"?>
+<p:notes xmlns:a="http://schemas.openxmlformats.org/drawingml/2006/main" xmlns:p="http://schemas.openxmlformats.org/presentationml/2006/main" xmlns:r="http://schemas.openxmlformats.org/officeDocument/2006/relationships">
+  <p:cSld>
+    <p:spTree>
+      <p:nvGrpSpPr>
+        <p:cNvPr id="1" name=""/>
+        <p:cNvGrpSpPr/>
+        <p:nvPr/>
+      </p:nvGrpSpPr>
+      <p:grpSpPr>
+        <a:xfrm>
+          <a:off x="0" y="0"/>
+          <a:ext cx="0" cy="0"/>
+          <a:chOff x="0" y="0"/>
+          <a:chExt cx="0" cy="0"/>
+        </a:xfrm>
+      </p:grpSpPr>
+      <p:sp>
+        <p:nvSpPr>
+          <p:cNvPr id="2" name="Slide Image Placeholder 1"/>
+          <p:cNvSpPr>
+            <a:spLocks noGrp="1"/>
+          </p:cNvSpPr>
+          <p:nvPr>
+            <p:ph type="sldImg" idx="2"/>
+          </p:nvPr>
+        </p:nvSpPr>
+        <p:spPr/>
+      </p:sp>
+      <p:sp>
+        <p:nvSpPr>
+          <p:cNvPr id="3" name="Notes Placeholder 2"/>
+          <p:cNvSpPr>
+            <a:spLocks noGrp="1"/>
+          </p:cNvSpPr>
+          <p:nvPr>
+            <p:ph type="body" idx="3" sz="quarter"/>
+          </p:nvPr>
+        </p:nvSpPr>
+        <p:spPr/>
+        <p:txBody>
+          <a:bodyPr/>
+          <a:lstStyle/>
+          <a:p>
+            <a:r>
+              <a:t>TPM perspective: explain the architecture in terms of ownership, contracts, control points, and the smallest viable target state. Keep proposed controls visibly distinct.</a:t>
+            </a:r>
+          </a:p>
+        </p:txBody>
+      </p:sp>
+      <p:sp>
+        <p:nvSpPr>
+          <p:cNvPr id="4" name="Slide Number Placeholder 3"/>
+          <p:cNvSpPr>
+            <a:spLocks noGrp="1"/>
+          </p:cNvSpPr>
+          <p:nvPr>
+            <p:ph type="sldNum" idx="5" sz="quarter"/>
+          </p:nvPr>
+        </p:nvSpPr>
+        <p:spPr/>
+      </p:sp>
+    </p:spTree>
+  </p:cSld>
+  <p:clrMapOvr>
+    <a:masterClrMapping/>
+  </p:clrMapOvr>
+</p:notes>
+</file>
+
+<file path=ppt/notesSlides/notesSlide5.xml><?xml version="1.0" encoding="utf-8"?>
+<p:notes xmlns:a="http://schemas.openxmlformats.org/drawingml/2006/main" xmlns:p="http://schemas.openxmlformats.org/presentationml/2006/main" xmlns:r="http://schemas.openxmlformats.org/officeDocument/2006/relationships">
+  <p:cSld>
+    <p:spTree>
+      <p:nvGrpSpPr>
+        <p:cNvPr id="1" name=""/>
+        <p:cNvGrpSpPr/>
+        <p:nvPr/>
+      </p:nvGrpSpPr>
+      <p:grpSpPr>
+        <a:xfrm>
+          <a:off x="0" y="0"/>
+          <a:ext cx="0" cy="0"/>
+          <a:chOff x="0" y="0"/>
+          <a:chExt cx="0" cy="0"/>
+        </a:xfrm>
+      </p:grpSpPr>
+      <p:sp>
+        <p:nvSpPr>
+          <p:cNvPr id="2" name="Slide Image Placeholder 1"/>
+          <p:cNvSpPr>
+            <a:spLocks noGrp="1"/>
+          </p:cNvSpPr>
+          <p:nvPr>
+            <p:ph type="sldImg" idx="2"/>
+          </p:nvPr>
+        </p:nvSpPr>
+        <p:spPr/>
+      </p:sp>
+      <p:sp>
+        <p:nvSpPr>
+          <p:cNvPr id="3" name="Notes Placeholder 2"/>
+          <p:cNvSpPr>
+            <a:spLocks noGrp="1"/>
+          </p:cNvSpPr>
+          <p:nvPr>
+            <p:ph type="body" idx="3" sz="quarter"/>
+          </p:nvPr>
+        </p:nvSpPr>
+        <p:spPr/>
+        <p:txBody>
+          <a:bodyPr/>
+          <a:lstStyle/>
+          <a:p>
+            <a:r>
+              <a:t>TPM perspective: show which workstreams can proceed in parallel and where the data dependencies join. Do not call this a calculated critical path.</a:t>
+            </a:r>
+          </a:p>
+        </p:txBody>
+      </p:sp>
+      <p:sp>
+        <p:nvSpPr>
+          <p:cNvPr id="4" name="Slide Number Placeholder 3"/>
+          <p:cNvSpPr>
+            <a:spLocks noGrp="1"/>
+          </p:cNvSpPr>
+          <p:nvPr>
+            <p:ph type="sldNum" idx="5" sz="quarter"/>
+          </p:nvPr>
+        </p:nvSpPr>
+        <p:spPr/>
+      </p:sp>
+    </p:spTree>
+  </p:cSld>
+  <p:clrMapOvr>
+    <a:masterClrMapping/>
+  </p:clrMapOvr>
+</p:notes>
+</file>
+
+<file path=ppt/notesSlides/notesSlide6.xml><?xml version="1.0" encoding="utf-8"?>
+<p:notes xmlns:a="http://schemas.openxmlformats.org/drawingml/2006/main" xmlns:p="http://schemas.openxmlformats.org/presentationml/2006/main" xmlns:r="http://schemas.openxmlformats.org/officeDocument/2006/relationships">
+  <p:cSld>
+    <p:spTree>
+      <p:nvGrpSpPr>
+        <p:cNvPr id="1" name=""/>
+        <p:cNvGrpSpPr/>
+        <p:nvPr/>
+      </p:nvGrpSpPr>
+      <p:grpSpPr>
+        <a:xfrm>
+          <a:off x="0" y="0"/>
+          <a:ext cx="0" cy="0"/>
+          <a:chOff x="0" y="0"/>
+          <a:chExt cx="0" cy="0"/>
+        </a:xfrm>
+      </p:grpSpPr>
+      <p:sp>
+        <p:nvSpPr>
+          <p:cNvPr id="2" name="Slide Image Placeholder 1"/>
+          <p:cNvSpPr>
+            <a:spLocks noGrp="1"/>
+          </p:cNvSpPr>
+          <p:nvPr>
+            <p:ph type="sldImg" idx="2"/>
+          </p:nvPr>
+        </p:nvSpPr>
+        <p:spPr/>
+      </p:sp>
+      <p:sp>
+        <p:nvSpPr>
+          <p:cNvPr id="3" name="Notes Placeholder 2"/>
+          <p:cNvSpPr>
+            <a:spLocks noGrp="1"/>
+          </p:cNvSpPr>
+          <p:nvPr>
+            <p:ph type="body" idx="3" sz="quarter"/>
+          </p:nvPr>
+        </p:nvSpPr>
+        <p:spPr/>
+        <p:txBody>
+          <a:bodyPr/>
+          <a:lstStyle/>
+          <a:p>
+            <a:r>
+              <a:t>TPM perspective: emphasize grain, financial precision, lineage, and business-key assumptions. Ask control owners to approve definitions before scaling.</a:t>
+            </a:r>
+          </a:p>
+        </p:txBody>
+      </p:sp>
+      <p:sp>
+        <p:nvSpPr>
+          <p:cNvPr id="4" name="Slide Number Placeholder 3"/>
+          <p:cNvSpPr>
+            <a:spLocks noGrp="1"/>
+          </p:cNvSpPr>
+          <p:nvPr>
+            <p:ph type="sldNum" idx="5" sz="quarter"/>
+          </p:nvPr>
+        </p:nvSpPr>
+        <p:spPr/>
+      </p:sp>
+    </p:spTree>
+  </p:cSld>
+  <p:clrMapOvr>
+    <a:masterClrMapping/>
+  </p:clrMapOvr>
+</p:notes>
+</file>
+
+<file path=ppt/notesSlides/notesSlide7.xml><?xml version="1.0" encoding="utf-8"?>
+<p:notes xmlns:a="http://schemas.openxmlformats.org/drawingml/2006/main" xmlns:p="http://schemas.openxmlformats.org/presentationml/2006/main" xmlns:r="http://schemas.openxmlformats.org/officeDocument/2006/relationships">
+  <p:cSld>
+    <p:spTree>
+      <p:nvGrpSpPr>
+        <p:cNvPr id="1" name=""/>
+        <p:cNvGrpSpPr/>
+        <p:nvPr/>
+      </p:nvGrpSpPr>
+      <p:grpSpPr>
+        <a:xfrm>
+          <a:off x="0" y="0"/>
+          <a:ext cx="0" cy="0"/>
+          <a:chOff x="0" y="0"/>
+          <a:chExt cx="0" cy="0"/>
+        </a:xfrm>
+      </p:grpSpPr>
+      <p:sp>
+        <p:nvSpPr>
+          <p:cNvPr id="2" name="Slide Image Placeholder 1"/>
+          <p:cNvSpPr>
+            <a:spLocks noGrp="1"/>
+          </p:cNvSpPr>
+          <p:nvPr>
+            <p:ph type="sldImg" idx="2"/>
+          </p:nvPr>
+        </p:nvSpPr>
+        <p:spPr/>
+      </p:sp>
+      <p:sp>
+        <p:nvSpPr>
+          <p:cNvPr id="3" name="Notes Placeholder 2"/>
+          <p:cNvSpPr>
+            <a:spLocks noGrp="1"/>
+          </p:cNvSpPr>
+          <p:nvPr>
+            <p:ph type="body" idx="3" sz="quarter"/>
+          </p:nvPr>
+        </p:nvSpPr>
+        <p:spPr/>
+        <p:txBody>
+          <a:bodyPr/>
+          <a:lstStyle/>
+          <a:p>
+            <a:r>
+              <a:t>TPM perspective: state assumptions before results. Use reconciliation and Product Control acceptance as gates; do not generalize the prototype formula to all instruments.</a:t>
+            </a:r>
+          </a:p>
+        </p:txBody>
+      </p:sp>
+      <p:sp>
+        <p:nvSpPr>
+          <p:cNvPr id="4" name="Slide Number Placeholder 3"/>
+          <p:cNvSpPr>
+            <a:spLocks noGrp="1"/>
+          </p:cNvSpPr>
+          <p:nvPr>
+            <p:ph type="sldNum" idx="5" sz="quarter"/>
+          </p:nvPr>
+        </p:nvSpPr>
+        <p:spPr/>
+      </p:sp>
+    </p:spTree>
+  </p:cSld>
+  <p:clrMapOvr>
+    <a:masterClrMapping/>
+  </p:clrMapOvr>
+</p:notes>
+</file>
+
+<file path=ppt/notesSlides/notesSlide8.xml><?xml version="1.0" encoding="utf-8"?>
+<p:notes xmlns:a="http://schemas.openxmlformats.org/drawingml/2006/main" xmlns:p="http://schemas.openxmlformats.org/presentationml/2006/main" xmlns:r="http://schemas.openxmlformats.org/officeDocument/2006/relationships">
+  <p:cSld>
+    <p:spTree>
+      <p:nvGrpSpPr>
+        <p:cNvPr id="1" name=""/>
+        <p:cNvGrpSpPr/>
+        <p:nvPr/>
+      </p:nvGrpSpPr>
+      <p:grpSpPr>
+        <a:xfrm>
+          <a:off x="0" y="0"/>
+          <a:ext cx="0" cy="0"/>
+          <a:chOff x="0" y="0"/>
+          <a:chExt cx="0" cy="0"/>
+        </a:xfrm>
+      </p:grpSpPr>
+      <p:sp>
+        <p:nvSpPr>
+          <p:cNvPr id="2" name="Slide Image Placeholder 1"/>
+          <p:cNvSpPr>
+            <a:spLocks noGrp="1"/>
+          </p:cNvSpPr>
+          <p:nvPr>
+            <p:ph type="sldImg" idx="2"/>
+          </p:nvPr>
+        </p:nvSpPr>
+        <p:spPr/>
+      </p:sp>
+      <p:sp>
+        <p:nvSpPr>
+          <p:cNvPr id="3" name="Notes Placeholder 2"/>
+          <p:cNvSpPr>
+            <a:spLocks noGrp="1"/>
+          </p:cNvSpPr>
+          <p:nvPr>
+            <p:ph type="body" idx="3" sz="quarter"/>
+          </p:nvPr>
+        </p:nvSpPr>
+        <p:spPr/>
+        <p:txBody>
+          <a:bodyPr/>
+          <a:lstStyle/>
+          <a:p>
+            <a:r>
+              <a:t>TPM perspective: treat identity, promotion, alerting, support, rerun evidence, and schedule activation as explicit readiness decisions.</a:t>
+            </a:r>
+          </a:p>
+        </p:txBody>
+      </p:sp>
+      <p:sp>
+        <p:nvSpPr>
+          <p:cNvPr id="4" name="Slide Number Placeholder 3"/>
+          <p:cNvSpPr>
+            <a:spLocks noGrp="1"/>
+          </p:cNvSpPr>
+          <p:nvPr>
+            <p:ph type="sldNum" idx="5" sz="quarter"/>
+          </p:nvPr>
+        </p:nvSpPr>
+        <p:spPr/>
+      </p:sp>
+    </p:spTree>
+  </p:cSld>
+  <p:clrMapOvr>
+    <a:masterClrMapping/>
+  </p:clrMapOvr>
+</p:notes>
+</file>
+
+<file path=ppt/notesSlides/notesSlide9.xml><?xml version="1.0" encoding="utf-8"?>
+<p:notes xmlns:a="http://schemas.openxmlformats.org/drawingml/2006/main" xmlns:p="http://schemas.openxmlformats.org/presentationml/2006/main" xmlns:r="http://schemas.openxmlformats.org/officeDocument/2006/relationships">
+  <p:cSld>
+    <p:spTree>
+      <p:nvGrpSpPr>
+        <p:cNvPr id="1" name=""/>
+        <p:cNvGrpSpPr/>
+        <p:nvPr/>
+      </p:nvGrpSpPr>
+      <p:grpSpPr>
+        <a:xfrm>
+          <a:off x="0" y="0"/>
+          <a:ext cx="0" cy="0"/>
+          <a:chOff x="0" y="0"/>
+          <a:chExt cx="0" cy="0"/>
+        </a:xfrm>
+      </p:grpSpPr>
+      <p:sp>
+        <p:nvSpPr>
+          <p:cNvPr id="2" name="Slide Image Placeholder 1"/>
+          <p:cNvSpPr>
+            <a:spLocks noGrp="1"/>
+          </p:cNvSpPr>
+          <p:nvPr>
+            <p:ph type="sldImg" idx="2"/>
+          </p:nvPr>
+        </p:nvSpPr>
+        <p:spPr/>
+      </p:sp>
+      <p:sp>
+        <p:nvSpPr>
+          <p:cNvPr id="3" name="Notes Placeholder 2"/>
+          <p:cNvSpPr>
+            <a:spLocks noGrp="1"/>
+          </p:cNvSpPr>
+          <p:nvPr>
+            <p:ph type="body" idx="3" sz="quarter"/>
+          </p:nvPr>
+        </p:nvSpPr>
+        <p:spPr/>
+        <p:txBody>
+          <a:bodyPr/>
+          <a:lstStyle/>
+          <a:p>
+            <a:r>
+              <a:t>TPM perspective: preserve the current architecture unless an approved requirement demands change. Sequence target controls behind source, security, and support decisions.</a:t>
+            </a:r>
+          </a:p>
+        </p:txBody>
+      </p:sp>
+      <p:sp>
+        <p:nvSpPr>
+          <p:cNvPr id="4" name="Slide Number Placeholder 3"/>
+          <p:cNvSpPr>
+            <a:spLocks noGrp="1"/>
+          </p:cNvSpPr>
+          <p:nvPr>
+            <p:ph type="sldNum" idx="5" sz="quarter"/>
+          </p:nvPr>
+        </p:nvSpPr>
+        <p:spPr/>
+      </p:sp>
+    </p:spTree>
+  </p:cSld>
+  <p:clrMapOvr>
+    <a:masterClrMapping/>
+  </p:clrMapOvr>
+</p:notes>
 </file>
 
 <file path=ppt/slideLayouts/slideLayout1.xml><?xml version="1.0" encoding="utf-8"?>
@@ -3901,6 +5024,1661 @@
 </p:sld>
 </file>
 
+<file path=ppt/slides/slide10.xml><?xml version="1.0" encoding="utf-8"?>
+<p:sld xmlns:a="http://schemas.openxmlformats.org/drawingml/2006/main" xmlns:p="http://schemas.openxmlformats.org/presentationml/2006/main" xmlns:r="http://schemas.openxmlformats.org/officeDocument/2006/relationships">
+  <p:cSld>
+    <p:bg>
+      <p:bgPr>
+        <a:solidFill>
+          <a:srgbClr val="FFFFFF"/>
+        </a:solidFill>
+        <a:effectLst/>
+      </p:bgPr>
+    </p:bg>
+    <p:spTree>
+      <p:nvGrpSpPr>
+        <p:cNvPr id="1" name=""/>
+        <p:cNvGrpSpPr/>
+        <p:nvPr/>
+      </p:nvGrpSpPr>
+      <p:grpSpPr/>
+      <p:sp>
+        <p:nvSpPr>
+          <p:cNvPr id="2" name="Rectangle 1"/>
+          <p:cNvSpPr/>
+          <p:nvPr/>
+        </p:nvSpPr>
+        <p:spPr>
+          <a:xfrm>
+            <a:off x="0" y="0"/>
+            <a:ext cx="12191695" cy="109728"/>
+          </a:xfrm>
+          <a:prstGeom prst="rect">
+            <a:avLst/>
+          </a:prstGeom>
+          <a:solidFill>
+            <a:srgbClr val="007C78"/>
+          </a:solidFill>
+          <a:ln>
+            <a:noFill/>
+          </a:ln>
+        </p:spPr>
+        <p:style>
+          <a:lnRef idx="1">
+            <a:schemeClr val="accent1"/>
+          </a:lnRef>
+          <a:fillRef idx="3">
+            <a:schemeClr val="accent1"/>
+          </a:fillRef>
+          <a:effectRef idx="2">
+            <a:schemeClr val="accent1"/>
+          </a:effectRef>
+          <a:fontRef idx="minor">
+            <a:schemeClr val="lt1"/>
+          </a:fontRef>
+        </p:style>
+        <p:txBody>
+          <a:bodyPr rtlCol="0" anchor="ctr"/>
+          <a:lstStyle/>
+          <a:p>
+            <a:pPr algn="ctr"/>
+          </a:p>
+        </p:txBody>
+      </p:sp>
+      <p:sp>
+        <p:nvSpPr>
+          <p:cNvPr id="3" name="TextBox 2"/>
+          <p:cNvSpPr txBox="1"/>
+          <p:nvPr/>
+        </p:nvSpPr>
+        <p:spPr>
+          <a:xfrm>
+            <a:off x="502920" y="283464"/>
+            <a:ext cx="10789920" cy="502920"/>
+          </a:xfrm>
+          <a:prstGeom prst="rect">
+            <a:avLst/>
+          </a:prstGeom>
+          <a:noFill/>
+        </p:spPr>
+        <p:txBody>
+          <a:bodyPr wrap="square" lIns="45720" rIns="45720" tIns="27432" bIns="18288">
+            <a:spAutoFit/>
+          </a:bodyPr>
+          <a:lstStyle/>
+          <a:p>
+            <a:pPr algn="l">
+              <a:defRPr sz="2500" b="1">
+                <a:solidFill>
+                  <a:srgbClr val="16324F"/>
+                </a:solidFill>
+                <a:latin typeface="Aptos Display"/>
+              </a:defRPr>
+            </a:pPr>
+            <a:r>
+              <a:t>Data quality and reconciliation controls</a:t>
+            </a:r>
+          </a:p>
+        </p:txBody>
+      </p:sp>
+      <p:sp>
+        <p:nvSpPr>
+          <p:cNvPr id="4" name="TextBox 3"/>
+          <p:cNvSpPr txBox="1"/>
+          <p:nvPr/>
+        </p:nvSpPr>
+        <p:spPr>
+          <a:xfrm>
+            <a:off x="530352" y="804672"/>
+            <a:ext cx="10972800" cy="256032"/>
+          </a:xfrm>
+          <a:prstGeom prst="rect">
+            <a:avLst/>
+          </a:prstGeom>
+          <a:noFill/>
+        </p:spPr>
+        <p:txBody>
+          <a:bodyPr wrap="square" lIns="45720" rIns="45720" tIns="27432" bIns="18288">
+            <a:spAutoFit/>
+          </a:bodyPr>
+          <a:lstStyle/>
+          <a:p>
+            <a:pPr algn="l">
+              <a:defRPr sz="900" b="1">
+                <a:solidFill>
+                  <a:srgbClr val="007C78"/>
+                </a:solidFill>
+                <a:latin typeface="Aptos"/>
+              </a:defRPr>
+            </a:pPr>
+            <a:r>
+              <a:t>09 | QUALITY AND RECONCILIATION</a:t>
+            </a:r>
+          </a:p>
+        </p:txBody>
+      </p:sp>
+      <p:sp>
+        <p:nvSpPr>
+          <p:cNvPr id="5" name="Rectangle 4"/>
+          <p:cNvSpPr/>
+          <p:nvPr/>
+        </p:nvSpPr>
+        <p:spPr>
+          <a:xfrm>
+            <a:off x="502920" y="6510528"/>
+            <a:ext cx="11173968" cy="10972"/>
+          </a:xfrm>
+          <a:prstGeom prst="rect">
+            <a:avLst/>
+          </a:prstGeom>
+          <a:solidFill>
+            <a:srgbClr val="D7E0E5"/>
+          </a:solidFill>
+          <a:ln>
+            <a:noFill/>
+          </a:ln>
+        </p:spPr>
+        <p:style>
+          <a:lnRef idx="1">
+            <a:schemeClr val="accent1"/>
+          </a:lnRef>
+          <a:fillRef idx="3">
+            <a:schemeClr val="accent1"/>
+          </a:fillRef>
+          <a:effectRef idx="2">
+            <a:schemeClr val="accent1"/>
+          </a:effectRef>
+          <a:fontRef idx="minor">
+            <a:schemeClr val="lt1"/>
+          </a:fontRef>
+        </p:style>
+        <p:txBody>
+          <a:bodyPr rtlCol="0" anchor="ctr"/>
+          <a:lstStyle/>
+          <a:p>
+            <a:pPr algn="ctr"/>
+          </a:p>
+        </p:txBody>
+      </p:sp>
+      <p:sp>
+        <p:nvSpPr>
+          <p:cNvPr id="6" name="TextBox 5"/>
+          <p:cNvSpPr txBox="1"/>
+          <p:nvPr/>
+        </p:nvSpPr>
+        <p:spPr>
+          <a:xfrm>
+            <a:off x="530352" y="6556248"/>
+            <a:ext cx="9601200" cy="164592"/>
+          </a:xfrm>
+          <a:prstGeom prst="rect">
+            <a:avLst/>
+          </a:prstGeom>
+          <a:noFill/>
+        </p:spPr>
+        <p:txBody>
+          <a:bodyPr wrap="square" lIns="45720" rIns="45720" tIns="27432" bIns="18288">
+            <a:spAutoFit/>
+          </a:bodyPr>
+          <a:lstStyle/>
+          <a:p>
+            <a:pPr algn="l">
+              <a:defRPr sz="800" b="0">
+                <a:solidFill>
+                  <a:srgbClr val="647786"/>
+                </a:solidFill>
+                <a:latin typeface="Aptos"/>
+              </a:defRPr>
+            </a:pPr>
+            <a:r>
+              <a:t>TRADING PLATFORM  |  EVIDENCE BASELINE 2026-10-14  |  PROPOSED DELIVERY PLAN</a:t>
+            </a:r>
+          </a:p>
+        </p:txBody>
+      </p:sp>
+      <p:sp>
+        <p:nvSpPr>
+          <p:cNvPr id="7" name="TextBox 6"/>
+          <p:cNvSpPr txBox="1"/>
+          <p:nvPr/>
+        </p:nvSpPr>
+        <p:spPr>
+          <a:xfrm>
+            <a:off x="11109960" y="6537960"/>
+            <a:ext cx="502920" cy="182880"/>
+          </a:xfrm>
+          <a:prstGeom prst="rect">
+            <a:avLst/>
+          </a:prstGeom>
+          <a:noFill/>
+        </p:spPr>
+        <p:txBody>
+          <a:bodyPr wrap="square" lIns="45720" rIns="45720" tIns="27432" bIns="18288">
+            <a:spAutoFit/>
+          </a:bodyPr>
+          <a:lstStyle/>
+          <a:p>
+            <a:pPr algn="r">
+              <a:defRPr sz="900" b="1">
+                <a:solidFill>
+                  <a:srgbClr val="647786"/>
+                </a:solidFill>
+                <a:latin typeface="Aptos"/>
+              </a:defRPr>
+            </a:pPr>
+            <a:r>
+              <a:t>10</a:t>
+            </a:r>
+          </a:p>
+        </p:txBody>
+      </p:sp>
+      <p:sp>
+        <p:nvSpPr>
+          <p:cNvPr id="8" name="Rounded Rectangle 7"/>
+          <p:cNvSpPr/>
+          <p:nvPr/>
+        </p:nvSpPr>
+        <p:spPr>
+          <a:xfrm>
+            <a:off x="594360" y="1371600"/>
+            <a:ext cx="3401568" cy="3273552"/>
+          </a:xfrm>
+          <a:prstGeom prst="roundRect">
+            <a:avLst>
+              <a:gd name="adj" fmla="val 8000"/>
+            </a:avLst>
+          </a:prstGeom>
+          <a:solidFill>
+            <a:srgbClr val="EFF4F6"/>
+          </a:solidFill>
+          <a:ln w="10160">
+            <a:solidFill>
+              <a:srgbClr val="D7E0E5"/>
+            </a:solidFill>
+          </a:ln>
+        </p:spPr>
+        <p:style>
+          <a:lnRef idx="1">
+            <a:schemeClr val="accent1"/>
+          </a:lnRef>
+          <a:fillRef idx="3">
+            <a:schemeClr val="accent1"/>
+          </a:fillRef>
+          <a:effectRef idx="2">
+            <a:schemeClr val="accent1"/>
+          </a:effectRef>
+          <a:fontRef idx="minor">
+            <a:schemeClr val="lt1"/>
+          </a:fontRef>
+        </p:style>
+        <p:txBody>
+          <a:bodyPr rtlCol="0" anchor="ctr"/>
+          <a:lstStyle/>
+          <a:p>
+            <a:pPr algn="ctr"/>
+          </a:p>
+        </p:txBody>
+      </p:sp>
+      <p:sp>
+        <p:nvSpPr>
+          <p:cNvPr id="9" name="Rectangle 8"/>
+          <p:cNvSpPr/>
+          <p:nvPr/>
+        </p:nvSpPr>
+        <p:spPr>
+          <a:xfrm>
+            <a:off x="594360" y="1371600"/>
+            <a:ext cx="64008" cy="3273552"/>
+          </a:xfrm>
+          <a:prstGeom prst="rect">
+            <a:avLst/>
+          </a:prstGeom>
+          <a:solidFill>
+            <a:srgbClr val="007C78"/>
+          </a:solidFill>
+          <a:ln>
+            <a:noFill/>
+          </a:ln>
+        </p:spPr>
+        <p:style>
+          <a:lnRef idx="1">
+            <a:schemeClr val="accent1"/>
+          </a:lnRef>
+          <a:fillRef idx="3">
+            <a:schemeClr val="accent1"/>
+          </a:fillRef>
+          <a:effectRef idx="2">
+            <a:schemeClr val="accent1"/>
+          </a:effectRef>
+          <a:fontRef idx="minor">
+            <a:schemeClr val="lt1"/>
+          </a:fontRef>
+        </p:style>
+        <p:txBody>
+          <a:bodyPr rtlCol="0" anchor="ctr"/>
+          <a:lstStyle/>
+          <a:p>
+            <a:pPr algn="ctr"/>
+          </a:p>
+        </p:txBody>
+      </p:sp>
+      <p:sp>
+        <p:nvSpPr>
+          <p:cNvPr id="10" name="TextBox 9"/>
+          <p:cNvSpPr txBox="1"/>
+          <p:nvPr/>
+        </p:nvSpPr>
+        <p:spPr>
+          <a:xfrm>
+            <a:off x="758952" y="1472184"/>
+            <a:ext cx="3127248" cy="310896"/>
+          </a:xfrm>
+          <a:prstGeom prst="rect">
+            <a:avLst/>
+          </a:prstGeom>
+          <a:noFill/>
+        </p:spPr>
+        <p:txBody>
+          <a:bodyPr wrap="square" lIns="45720" rIns="45720" tIns="27432" bIns="18288">
+            <a:spAutoFit/>
+          </a:bodyPr>
+          <a:lstStyle/>
+          <a:p>
+            <a:pPr algn="l">
+              <a:defRPr sz="1600" b="1">
+                <a:solidFill>
+                  <a:srgbClr val="16324F"/>
+                </a:solidFill>
+                <a:latin typeface="Aptos"/>
+              </a:defRPr>
+            </a:pPr>
+            <a:r>
+              <a:t>Ingestion / Silver</a:t>
+            </a:r>
+          </a:p>
+        </p:txBody>
+      </p:sp>
+      <p:sp>
+        <p:nvSpPr>
+          <p:cNvPr id="11" name="TextBox 10"/>
+          <p:cNvSpPr txBox="1"/>
+          <p:nvPr/>
+        </p:nvSpPr>
+        <p:spPr>
+          <a:xfrm>
+            <a:off x="758952" y="1828800"/>
+            <a:ext cx="3118104" cy="2752344"/>
+          </a:xfrm>
+          <a:prstGeom prst="rect">
+            <a:avLst/>
+          </a:prstGeom>
+          <a:noFill/>
+        </p:spPr>
+        <p:txBody>
+          <a:bodyPr wrap="square" lIns="45720" rIns="45720" tIns="27432" bIns="18288">
+            <a:spAutoFit/>
+          </a:bodyPr>
+          <a:lstStyle/>
+          <a:p>
+            <a:pPr algn="l">
+              <a:defRPr sz="1200" b="0">
+                <a:solidFill>
+                  <a:srgbClr val="233746"/>
+                </a:solidFill>
+                <a:latin typeface="Aptos"/>
+              </a:defRPr>
+            </a:pPr>
+            <a:r>
+              <a:t>Exact CSV header and structural checks</a:t>
+            </a:r>
+            <a:br/>
+            <a:r>
+              <a:t>Typed conversion; business rules</a:t>
+            </a:r>
+            <a:br/>
+            <a:r>
+              <a:t>Version and duplicate selection</a:t>
+            </a:r>
+            <a:br/>
+            <a:r>
+              <a:t>Reject history with reason codes</a:t>
+            </a:r>
+            <a:br/>
+            <a:r>
+              <a:t>Expected price-session completeness gate</a:t>
+            </a:r>
+          </a:p>
+        </p:txBody>
+      </p:sp>
+      <p:sp>
+        <p:nvSpPr>
+          <p:cNvPr id="12" name="Rounded Rectangle 11"/>
+          <p:cNvSpPr/>
+          <p:nvPr/>
+        </p:nvSpPr>
+        <p:spPr>
+          <a:xfrm>
+            <a:off x="4370832" y="1371600"/>
+            <a:ext cx="3401568" cy="3273552"/>
+          </a:xfrm>
+          <a:prstGeom prst="roundRect">
+            <a:avLst>
+              <a:gd name="adj" fmla="val 8000"/>
+            </a:avLst>
+          </a:prstGeom>
+          <a:solidFill>
+            <a:srgbClr val="EAF3F1"/>
+          </a:solidFill>
+          <a:ln w="10160">
+            <a:solidFill>
+              <a:srgbClr val="D7E0E5"/>
+            </a:solidFill>
+          </a:ln>
+        </p:spPr>
+        <p:style>
+          <a:lnRef idx="1">
+            <a:schemeClr val="accent1"/>
+          </a:lnRef>
+          <a:fillRef idx="3">
+            <a:schemeClr val="accent1"/>
+          </a:fillRef>
+          <a:effectRef idx="2">
+            <a:schemeClr val="accent1"/>
+          </a:effectRef>
+          <a:fontRef idx="minor">
+            <a:schemeClr val="lt1"/>
+          </a:fontRef>
+        </p:style>
+        <p:txBody>
+          <a:bodyPr rtlCol="0" anchor="ctr"/>
+          <a:lstStyle/>
+          <a:p>
+            <a:pPr algn="ctr"/>
+          </a:p>
+        </p:txBody>
+      </p:sp>
+      <p:sp>
+        <p:nvSpPr>
+          <p:cNvPr id="13" name="Rectangle 12"/>
+          <p:cNvSpPr/>
+          <p:nvPr/>
+        </p:nvSpPr>
+        <p:spPr>
+          <a:xfrm>
+            <a:off x="4370832" y="1371600"/>
+            <a:ext cx="64008" cy="3273552"/>
+          </a:xfrm>
+          <a:prstGeom prst="rect">
+            <a:avLst/>
+          </a:prstGeom>
+          <a:solidFill>
+            <a:srgbClr val="2C6E9B"/>
+          </a:solidFill>
+          <a:ln>
+            <a:noFill/>
+          </a:ln>
+        </p:spPr>
+        <p:style>
+          <a:lnRef idx="1">
+            <a:schemeClr val="accent1"/>
+          </a:lnRef>
+          <a:fillRef idx="3">
+            <a:schemeClr val="accent1"/>
+          </a:fillRef>
+          <a:effectRef idx="2">
+            <a:schemeClr val="accent1"/>
+          </a:effectRef>
+          <a:fontRef idx="minor">
+            <a:schemeClr val="lt1"/>
+          </a:fontRef>
+        </p:style>
+        <p:txBody>
+          <a:bodyPr rtlCol="0" anchor="ctr"/>
+          <a:lstStyle/>
+          <a:p>
+            <a:pPr algn="ctr"/>
+          </a:p>
+        </p:txBody>
+      </p:sp>
+      <p:sp>
+        <p:nvSpPr>
+          <p:cNvPr id="14" name="TextBox 13"/>
+          <p:cNvSpPr txBox="1"/>
+          <p:nvPr/>
+        </p:nvSpPr>
+        <p:spPr>
+          <a:xfrm>
+            <a:off x="4535424" y="1472184"/>
+            <a:ext cx="3127248" cy="310896"/>
+          </a:xfrm>
+          <a:prstGeom prst="rect">
+            <a:avLst/>
+          </a:prstGeom>
+          <a:noFill/>
+        </p:spPr>
+        <p:txBody>
+          <a:bodyPr wrap="square" lIns="45720" rIns="45720" tIns="27432" bIns="18288">
+            <a:spAutoFit/>
+          </a:bodyPr>
+          <a:lstStyle/>
+          <a:p>
+            <a:pPr algn="l">
+              <a:defRPr sz="1600" b="1">
+                <a:solidFill>
+                  <a:srgbClr val="16324F"/>
+                </a:solidFill>
+                <a:latin typeface="Aptos"/>
+              </a:defRPr>
+            </a:pPr>
+            <a:r>
+              <a:t>Gold controls</a:t>
+            </a:r>
+          </a:p>
+        </p:txBody>
+      </p:sp>
+      <p:sp>
+        <p:nvSpPr>
+          <p:cNvPr id="15" name="TextBox 14"/>
+          <p:cNvSpPr txBox="1"/>
+          <p:nvPr/>
+        </p:nvSpPr>
+        <p:spPr>
+          <a:xfrm>
+            <a:off x="4535424" y="1828800"/>
+            <a:ext cx="3118104" cy="2752344"/>
+          </a:xfrm>
+          <a:prstGeom prst="rect">
+            <a:avLst/>
+          </a:prstGeom>
+          <a:noFill/>
+        </p:spPr>
+        <p:txBody>
+          <a:bodyPr wrap="square" lIns="45720" rIns="45720" tIns="27432" bIns="18288">
+            <a:spAutoFit/>
+          </a:bodyPr>
+          <a:lstStyle/>
+          <a:p>
+            <a:pPr algn="l">
+              <a:defRPr sz="1200" b="0">
+                <a:solidFill>
+                  <a:srgbClr val="233746"/>
+                </a:solidFill>
+                <a:latin typeface="Aptos"/>
+              </a:defRPr>
+            </a:pPr>
+            <a:r>
+              <a:t>Position key: date/book/counterparty/instrument/currency</a:t>
+            </a:r>
+            <a:br/>
+            <a:br/>
+            <a:r>
+              <a:t>P&amp;L key: date/book/symbol/currency</a:t>
+            </a:r>
+            <a:br/>
+            <a:br/>
+            <a:r>
+              <a:t>NULL for missing required marks/baselines; create valuation breaks</a:t>
+            </a:r>
+          </a:p>
+        </p:txBody>
+      </p:sp>
+      <p:sp>
+        <p:nvSpPr>
+          <p:cNvPr id="16" name="Rounded Rectangle 15"/>
+          <p:cNvSpPr/>
+          <p:nvPr/>
+        </p:nvSpPr>
+        <p:spPr>
+          <a:xfrm>
+            <a:off x="8138160" y="1371600"/>
+            <a:ext cx="3401568" cy="3273552"/>
+          </a:xfrm>
+          <a:prstGeom prst="roundRect">
+            <a:avLst>
+              <a:gd name="adj" fmla="val 8000"/>
+            </a:avLst>
+          </a:prstGeom>
+          <a:solidFill>
+            <a:srgbClr val="FAF0E5"/>
+          </a:solidFill>
+          <a:ln w="10160">
+            <a:solidFill>
+              <a:srgbClr val="D7E0E5"/>
+            </a:solidFill>
+          </a:ln>
+        </p:spPr>
+        <p:style>
+          <a:lnRef idx="1">
+            <a:schemeClr val="accent1"/>
+          </a:lnRef>
+          <a:fillRef idx="3">
+            <a:schemeClr val="accent1"/>
+          </a:fillRef>
+          <a:effectRef idx="2">
+            <a:schemeClr val="accent1"/>
+          </a:effectRef>
+          <a:fontRef idx="minor">
+            <a:schemeClr val="lt1"/>
+          </a:fontRef>
+        </p:style>
+        <p:txBody>
+          <a:bodyPr rtlCol="0" anchor="ctr"/>
+          <a:lstStyle/>
+          <a:p>
+            <a:pPr algn="ctr"/>
+          </a:p>
+        </p:txBody>
+      </p:sp>
+      <p:sp>
+        <p:nvSpPr>
+          <p:cNvPr id="17" name="Rectangle 16"/>
+          <p:cNvSpPr/>
+          <p:nvPr/>
+        </p:nvSpPr>
+        <p:spPr>
+          <a:xfrm>
+            <a:off x="8138160" y="1371600"/>
+            <a:ext cx="64008" cy="3273552"/>
+          </a:xfrm>
+          <a:prstGeom prst="rect">
+            <a:avLst/>
+          </a:prstGeom>
+          <a:solidFill>
+            <a:srgbClr val="C8752D"/>
+          </a:solidFill>
+          <a:ln>
+            <a:noFill/>
+          </a:ln>
+        </p:spPr>
+        <p:style>
+          <a:lnRef idx="1">
+            <a:schemeClr val="accent1"/>
+          </a:lnRef>
+          <a:fillRef idx="3">
+            <a:schemeClr val="accent1"/>
+          </a:fillRef>
+          <a:effectRef idx="2">
+            <a:schemeClr val="accent1"/>
+          </a:effectRef>
+          <a:fontRef idx="minor">
+            <a:schemeClr val="lt1"/>
+          </a:fontRef>
+        </p:style>
+        <p:txBody>
+          <a:bodyPr rtlCol="0" anchor="ctr"/>
+          <a:lstStyle/>
+          <a:p>
+            <a:pPr algn="ctr"/>
+          </a:p>
+        </p:txBody>
+      </p:sp>
+      <p:sp>
+        <p:nvSpPr>
+          <p:cNvPr id="18" name="TextBox 17"/>
+          <p:cNvSpPr txBox="1"/>
+          <p:nvPr/>
+        </p:nvSpPr>
+        <p:spPr>
+          <a:xfrm>
+            <a:off x="8302752" y="1472184"/>
+            <a:ext cx="3127248" cy="310896"/>
+          </a:xfrm>
+          <a:prstGeom prst="rect">
+            <a:avLst/>
+          </a:prstGeom>
+          <a:noFill/>
+        </p:spPr>
+        <p:txBody>
+          <a:bodyPr wrap="square" lIns="45720" rIns="45720" tIns="27432" bIns="18288">
+            <a:spAutoFit/>
+          </a:bodyPr>
+          <a:lstStyle/>
+          <a:p>
+            <a:pPr algn="l">
+              <a:defRPr sz="1500" b="1">
+                <a:solidFill>
+                  <a:srgbClr val="16324F"/>
+                </a:solidFill>
+                <a:latin typeface="Aptos"/>
+              </a:defRPr>
+            </a:pPr>
+            <a:r>
+              <a:t>Evidence and gaps</a:t>
+            </a:r>
+          </a:p>
+        </p:txBody>
+      </p:sp>
+      <p:sp>
+        <p:nvSpPr>
+          <p:cNvPr id="19" name="TextBox 18"/>
+          <p:cNvSpPr txBox="1"/>
+          <p:nvPr/>
+        </p:nvSpPr>
+        <p:spPr>
+          <a:xfrm>
+            <a:off x="8302752" y="1828800"/>
+            <a:ext cx="3118104" cy="2752344"/>
+          </a:xfrm>
+          <a:prstGeom prst="rect">
+            <a:avLst/>
+          </a:prstGeom>
+          <a:noFill/>
+        </p:spPr>
+        <p:txBody>
+          <a:bodyPr wrap="square" lIns="45720" rIns="45720" tIns="27432" bIns="18288">
+            <a:spAutoFit/>
+          </a:bodyPr>
+          <a:lstStyle/>
+          <a:p>
+            <a:pPr algn="l">
+              <a:defRPr sz="1100" b="0">
+                <a:solidFill>
+                  <a:srgbClr val="233746"/>
+                </a:solidFill>
+                <a:latin typeface="Aptos"/>
+              </a:defRPr>
+            </a:pPr>
+            <a:r>
+              <a:t>Unit and fixture tests in repository</a:t>
+            </a:r>
+            <a:br/>
+            <a:r>
+              <a:t>2026-10-11 run: 5,990 positions and 835 P&amp;L rows; zero reported independent SQL mismatches</a:t>
+            </a:r>
+            <a:br/>
+            <a:br/>
+            <a:r>
+              <a:t>Same-input second run: NOT VERIFIED</a:t>
+            </a:r>
+            <a:br/>
+            <a:r>
+              <a:t>3 focused local tests fail on stale DDL paths</a:t>
+            </a:r>
+          </a:p>
+        </p:txBody>
+      </p:sp>
+      <p:sp>
+        <p:nvSpPr>
+          <p:cNvPr id="20" name="TextBox 19"/>
+          <p:cNvSpPr txBox="1"/>
+          <p:nvPr/>
+        </p:nvSpPr>
+        <p:spPr>
+          <a:xfrm>
+            <a:off x="749808" y="5029200"/>
+            <a:ext cx="10607040" cy="713232"/>
+          </a:xfrm>
+          <a:prstGeom prst="rect">
+            <a:avLst/>
+          </a:prstGeom>
+          <a:noFill/>
+        </p:spPr>
+        <p:txBody>
+          <a:bodyPr wrap="square" lIns="45720" rIns="45720" tIns="27432" bIns="18288">
+            <a:spAutoFit/>
+          </a:bodyPr>
+          <a:lstStyle/>
+          <a:p>
+            <a:pPr algn="l">
+              <a:defRPr sz="1300" b="1">
+                <a:solidFill>
+                  <a:srgbClr val="16324F"/>
+                </a:solidFill>
+                <a:latin typeface="Aptos"/>
+              </a:defRPr>
+            </a:pPr>
+            <a:r>
+              <a:t>Release gate: rerun in a supported Spark/Delta environment, reconcile by business grain, close or disposition test failures, obtain Product Control acceptance, then record evidence.</a:t>
+            </a:r>
+          </a:p>
+        </p:txBody>
+      </p:sp>
+    </p:spTree>
+  </p:cSld>
+  <p:clrMapOvr>
+    <a:masterClrMapping/>
+  </p:clrMapOvr>
+</p:sld>
+</file>
+
+<file path=ppt/slides/slide11.xml><?xml version="1.0" encoding="utf-8"?>
+<p:sld xmlns:a="http://schemas.openxmlformats.org/drawingml/2006/main" xmlns:p="http://schemas.openxmlformats.org/presentationml/2006/main" xmlns:r="http://schemas.openxmlformats.org/officeDocument/2006/relationships">
+  <p:cSld>
+    <p:bg>
+      <p:bgPr>
+        <a:solidFill>
+          <a:srgbClr val="FFFFFF"/>
+        </a:solidFill>
+        <a:effectLst/>
+      </p:bgPr>
+    </p:bg>
+    <p:spTree>
+      <p:nvGrpSpPr>
+        <p:cNvPr id="1" name=""/>
+        <p:cNvGrpSpPr/>
+        <p:nvPr/>
+      </p:nvGrpSpPr>
+      <p:grpSpPr/>
+      <p:sp>
+        <p:nvSpPr>
+          <p:cNvPr id="2" name="Rectangle 1"/>
+          <p:cNvSpPr/>
+          <p:nvPr/>
+        </p:nvSpPr>
+        <p:spPr>
+          <a:xfrm>
+            <a:off x="0" y="0"/>
+            <a:ext cx="12191695" cy="109728"/>
+          </a:xfrm>
+          <a:prstGeom prst="rect">
+            <a:avLst/>
+          </a:prstGeom>
+          <a:solidFill>
+            <a:srgbClr val="007C78"/>
+          </a:solidFill>
+          <a:ln>
+            <a:noFill/>
+          </a:ln>
+        </p:spPr>
+        <p:style>
+          <a:lnRef idx="1">
+            <a:schemeClr val="accent1"/>
+          </a:lnRef>
+          <a:fillRef idx="3">
+            <a:schemeClr val="accent1"/>
+          </a:fillRef>
+          <a:effectRef idx="2">
+            <a:schemeClr val="accent1"/>
+          </a:effectRef>
+          <a:fontRef idx="minor">
+            <a:schemeClr val="lt1"/>
+          </a:fontRef>
+        </p:style>
+        <p:txBody>
+          <a:bodyPr rtlCol="0" anchor="ctr"/>
+          <a:lstStyle/>
+          <a:p>
+            <a:pPr algn="ctr"/>
+          </a:p>
+        </p:txBody>
+      </p:sp>
+      <p:sp>
+        <p:nvSpPr>
+          <p:cNvPr id="3" name="TextBox 2"/>
+          <p:cNvSpPr txBox="1"/>
+          <p:nvPr/>
+        </p:nvSpPr>
+        <p:spPr>
+          <a:xfrm>
+            <a:off x="502920" y="283464"/>
+            <a:ext cx="10789920" cy="502920"/>
+          </a:xfrm>
+          <a:prstGeom prst="rect">
+            <a:avLst/>
+          </a:prstGeom>
+          <a:noFill/>
+        </p:spPr>
+        <p:txBody>
+          <a:bodyPr wrap="square" lIns="45720" rIns="45720" tIns="27432" bIns="18288">
+            <a:spAutoFit/>
+          </a:bodyPr>
+          <a:lstStyle/>
+          <a:p>
+            <a:pPr algn="l">
+              <a:defRPr sz="2500" b="1">
+                <a:solidFill>
+                  <a:srgbClr val="16324F"/>
+                </a:solidFill>
+                <a:latin typeface="Aptos Display"/>
+              </a:defRPr>
+            </a:pPr>
+            <a:r>
+              <a:t>Security, deployment and operations readiness</a:t>
+            </a:r>
+          </a:p>
+        </p:txBody>
+      </p:sp>
+      <p:sp>
+        <p:nvSpPr>
+          <p:cNvPr id="4" name="TextBox 3"/>
+          <p:cNvSpPr txBox="1"/>
+          <p:nvPr/>
+        </p:nvSpPr>
+        <p:spPr>
+          <a:xfrm>
+            <a:off x="530352" y="804672"/>
+            <a:ext cx="10972800" cy="256032"/>
+          </a:xfrm>
+          <a:prstGeom prst="rect">
+            <a:avLst/>
+          </a:prstGeom>
+          <a:noFill/>
+        </p:spPr>
+        <p:txBody>
+          <a:bodyPr wrap="square" lIns="45720" rIns="45720" tIns="27432" bIns="18288">
+            <a:spAutoFit/>
+          </a:bodyPr>
+          <a:lstStyle/>
+          <a:p>
+            <a:pPr algn="l">
+              <a:defRPr sz="900" b="1">
+                <a:solidFill>
+                  <a:srgbClr val="007C78"/>
+                </a:solidFill>
+                <a:latin typeface="Aptos"/>
+              </a:defRPr>
+            </a:pPr>
+            <a:r>
+              <a:t>10 | SECURITY AND OPERATIONS</a:t>
+            </a:r>
+          </a:p>
+        </p:txBody>
+      </p:sp>
+      <p:sp>
+        <p:nvSpPr>
+          <p:cNvPr id="5" name="Rectangle 4"/>
+          <p:cNvSpPr/>
+          <p:nvPr/>
+        </p:nvSpPr>
+        <p:spPr>
+          <a:xfrm>
+            <a:off x="502920" y="6510528"/>
+            <a:ext cx="11173968" cy="10972"/>
+          </a:xfrm>
+          <a:prstGeom prst="rect">
+            <a:avLst/>
+          </a:prstGeom>
+          <a:solidFill>
+            <a:srgbClr val="D7E0E5"/>
+          </a:solidFill>
+          <a:ln>
+            <a:noFill/>
+          </a:ln>
+        </p:spPr>
+        <p:style>
+          <a:lnRef idx="1">
+            <a:schemeClr val="accent1"/>
+          </a:lnRef>
+          <a:fillRef idx="3">
+            <a:schemeClr val="accent1"/>
+          </a:fillRef>
+          <a:effectRef idx="2">
+            <a:schemeClr val="accent1"/>
+          </a:effectRef>
+          <a:fontRef idx="minor">
+            <a:schemeClr val="lt1"/>
+          </a:fontRef>
+        </p:style>
+        <p:txBody>
+          <a:bodyPr rtlCol="0" anchor="ctr"/>
+          <a:lstStyle/>
+          <a:p>
+            <a:pPr algn="ctr"/>
+          </a:p>
+        </p:txBody>
+      </p:sp>
+      <p:sp>
+        <p:nvSpPr>
+          <p:cNvPr id="6" name="TextBox 5"/>
+          <p:cNvSpPr txBox="1"/>
+          <p:nvPr/>
+        </p:nvSpPr>
+        <p:spPr>
+          <a:xfrm>
+            <a:off x="530352" y="6556248"/>
+            <a:ext cx="9601200" cy="164592"/>
+          </a:xfrm>
+          <a:prstGeom prst="rect">
+            <a:avLst/>
+          </a:prstGeom>
+          <a:noFill/>
+        </p:spPr>
+        <p:txBody>
+          <a:bodyPr wrap="square" lIns="45720" rIns="45720" tIns="27432" bIns="18288">
+            <a:spAutoFit/>
+          </a:bodyPr>
+          <a:lstStyle/>
+          <a:p>
+            <a:pPr algn="l">
+              <a:defRPr sz="800" b="0">
+                <a:solidFill>
+                  <a:srgbClr val="647786"/>
+                </a:solidFill>
+                <a:latin typeface="Aptos"/>
+              </a:defRPr>
+            </a:pPr>
+            <a:r>
+              <a:t>TRADING PLATFORM  |  EVIDENCE BASELINE 2026-10-14  |  PROPOSED DELIVERY PLAN</a:t>
+            </a:r>
+          </a:p>
+        </p:txBody>
+      </p:sp>
+      <p:sp>
+        <p:nvSpPr>
+          <p:cNvPr id="7" name="TextBox 6"/>
+          <p:cNvSpPr txBox="1"/>
+          <p:nvPr/>
+        </p:nvSpPr>
+        <p:spPr>
+          <a:xfrm>
+            <a:off x="11109960" y="6537960"/>
+            <a:ext cx="502920" cy="182880"/>
+          </a:xfrm>
+          <a:prstGeom prst="rect">
+            <a:avLst/>
+          </a:prstGeom>
+          <a:noFill/>
+        </p:spPr>
+        <p:txBody>
+          <a:bodyPr wrap="square" lIns="45720" rIns="45720" tIns="27432" bIns="18288">
+            <a:spAutoFit/>
+          </a:bodyPr>
+          <a:lstStyle/>
+          <a:p>
+            <a:pPr algn="r">
+              <a:defRPr sz="900" b="1">
+                <a:solidFill>
+                  <a:srgbClr val="647786"/>
+                </a:solidFill>
+                <a:latin typeface="Aptos"/>
+              </a:defRPr>
+            </a:pPr>
+            <a:r>
+              <a:t>11</a:t>
+            </a:r>
+          </a:p>
+        </p:txBody>
+      </p:sp>
+      <p:sp>
+        <p:nvSpPr>
+          <p:cNvPr id="8" name="Rounded Rectangle 7"/>
+          <p:cNvSpPr/>
+          <p:nvPr/>
+        </p:nvSpPr>
+        <p:spPr>
+          <a:xfrm>
+            <a:off x="594360" y="1344168"/>
+            <a:ext cx="3401568" cy="3474720"/>
+          </a:xfrm>
+          <a:prstGeom prst="roundRect">
+            <a:avLst>
+              <a:gd name="adj" fmla="val 8000"/>
+            </a:avLst>
+          </a:prstGeom>
+          <a:solidFill>
+            <a:srgbClr val="EAF3F1"/>
+          </a:solidFill>
+          <a:ln w="10160">
+            <a:solidFill>
+              <a:srgbClr val="D7E0E5"/>
+            </a:solidFill>
+          </a:ln>
+        </p:spPr>
+        <p:style>
+          <a:lnRef idx="1">
+            <a:schemeClr val="accent1"/>
+          </a:lnRef>
+          <a:fillRef idx="3">
+            <a:schemeClr val="accent1"/>
+          </a:fillRef>
+          <a:effectRef idx="2">
+            <a:schemeClr val="accent1"/>
+          </a:effectRef>
+          <a:fontRef idx="minor">
+            <a:schemeClr val="lt1"/>
+          </a:fontRef>
+        </p:style>
+        <p:txBody>
+          <a:bodyPr rtlCol="0" anchor="ctr"/>
+          <a:lstStyle/>
+          <a:p>
+            <a:pPr algn="ctr"/>
+          </a:p>
+        </p:txBody>
+      </p:sp>
+      <p:sp>
+        <p:nvSpPr>
+          <p:cNvPr id="9" name="Rectangle 8"/>
+          <p:cNvSpPr/>
+          <p:nvPr/>
+        </p:nvSpPr>
+        <p:spPr>
+          <a:xfrm>
+            <a:off x="594360" y="1344168"/>
+            <a:ext cx="64008" cy="3474720"/>
+          </a:xfrm>
+          <a:prstGeom prst="rect">
+            <a:avLst/>
+          </a:prstGeom>
+          <a:solidFill>
+            <a:srgbClr val="007C78"/>
+          </a:solidFill>
+          <a:ln>
+            <a:noFill/>
+          </a:ln>
+        </p:spPr>
+        <p:style>
+          <a:lnRef idx="1">
+            <a:schemeClr val="accent1"/>
+          </a:lnRef>
+          <a:fillRef idx="3">
+            <a:schemeClr val="accent1"/>
+          </a:fillRef>
+          <a:effectRef idx="2">
+            <a:schemeClr val="accent1"/>
+          </a:effectRef>
+          <a:fontRef idx="minor">
+            <a:schemeClr val="lt1"/>
+          </a:fontRef>
+        </p:style>
+        <p:txBody>
+          <a:bodyPr rtlCol="0" anchor="ctr"/>
+          <a:lstStyle/>
+          <a:p>
+            <a:pPr algn="ctr"/>
+          </a:p>
+        </p:txBody>
+      </p:sp>
+      <p:sp>
+        <p:nvSpPr>
+          <p:cNvPr id="10" name="TextBox 9"/>
+          <p:cNvSpPr txBox="1"/>
+          <p:nvPr/>
+        </p:nvSpPr>
+        <p:spPr>
+          <a:xfrm>
+            <a:off x="758952" y="1444752"/>
+            <a:ext cx="3127248" cy="310896"/>
+          </a:xfrm>
+          <a:prstGeom prst="rect">
+            <a:avLst/>
+          </a:prstGeom>
+          <a:noFill/>
+        </p:spPr>
+        <p:txBody>
+          <a:bodyPr wrap="square" lIns="45720" rIns="45720" tIns="27432" bIns="18288">
+            <a:spAutoFit/>
+          </a:bodyPr>
+          <a:lstStyle/>
+          <a:p>
+            <a:pPr algn="l">
+              <a:defRPr sz="1600" b="1">
+                <a:solidFill>
+                  <a:srgbClr val="16324F"/>
+                </a:solidFill>
+                <a:latin typeface="Aptos"/>
+              </a:defRPr>
+            </a:pPr>
+            <a:r>
+              <a:t>Verified controls</a:t>
+            </a:r>
+          </a:p>
+        </p:txBody>
+      </p:sp>
+      <p:sp>
+        <p:nvSpPr>
+          <p:cNvPr id="11" name="TextBox 10"/>
+          <p:cNvSpPr txBox="1"/>
+          <p:nvPr/>
+        </p:nvSpPr>
+        <p:spPr>
+          <a:xfrm>
+            <a:off x="758952" y="1801368"/>
+            <a:ext cx="3118104" cy="2953512"/>
+          </a:xfrm>
+          <a:prstGeom prst="rect">
+            <a:avLst/>
+          </a:prstGeom>
+          <a:noFill/>
+        </p:spPr>
+        <p:txBody>
+          <a:bodyPr wrap="square" lIns="45720" rIns="45720" tIns="27432" bIns="18288">
+            <a:spAutoFit/>
+          </a:bodyPr>
+          <a:lstStyle/>
+          <a:p>
+            <a:pPr algn="l">
+              <a:defRPr sz="1200" b="0">
+                <a:solidFill>
+                  <a:srgbClr val="233746"/>
+                </a:solidFill>
+                <a:latin typeface="Aptos"/>
+              </a:defRPr>
+            </a:pPr>
+            <a:r>
+              <a:t>Unity Catalog catalog/schemas and Volume</a:t>
+            </a:r>
+            <a:br/>
+            <a:br/>
+            <a:r>
+              <a:t>Grant template with principal placeholder</a:t>
+            </a:r>
+            <a:br/>
+            <a:br/>
+            <a:r>
+              <a:t>CLI authentication kept outside source</a:t>
+            </a:r>
+            <a:br/>
+            <a:br/>
+            <a:r>
+              <a:t>Task audit, error details, rejects, breaks</a:t>
+            </a:r>
+            <a:br/>
+            <a:br/>
+            <a:r>
+              <a:t>Asset Bundle builds/deploys dev wheel</a:t>
+            </a:r>
+          </a:p>
+        </p:txBody>
+      </p:sp>
+      <p:sp>
+        <p:nvSpPr>
+          <p:cNvPr id="12" name="Rounded Rectangle 11"/>
+          <p:cNvSpPr/>
+          <p:nvPr/>
+        </p:nvSpPr>
+        <p:spPr>
+          <a:xfrm>
+            <a:off x="4370832" y="1344168"/>
+            <a:ext cx="3401568" cy="3474720"/>
+          </a:xfrm>
+          <a:prstGeom prst="roundRect">
+            <a:avLst>
+              <a:gd name="adj" fmla="val 8000"/>
+            </a:avLst>
+          </a:prstGeom>
+          <a:solidFill>
+            <a:srgbClr val="FAF0E5"/>
+          </a:solidFill>
+          <a:ln w="10160">
+            <a:solidFill>
+              <a:srgbClr val="D7E0E5"/>
+            </a:solidFill>
+          </a:ln>
+        </p:spPr>
+        <p:style>
+          <a:lnRef idx="1">
+            <a:schemeClr val="accent1"/>
+          </a:lnRef>
+          <a:fillRef idx="3">
+            <a:schemeClr val="accent1"/>
+          </a:fillRef>
+          <a:effectRef idx="2">
+            <a:schemeClr val="accent1"/>
+          </a:effectRef>
+          <a:fontRef idx="minor">
+            <a:schemeClr val="lt1"/>
+          </a:fontRef>
+        </p:style>
+        <p:txBody>
+          <a:bodyPr rtlCol="0" anchor="ctr"/>
+          <a:lstStyle/>
+          <a:p>
+            <a:pPr algn="ctr"/>
+          </a:p>
+        </p:txBody>
+      </p:sp>
+      <p:sp>
+        <p:nvSpPr>
+          <p:cNvPr id="13" name="Rectangle 12"/>
+          <p:cNvSpPr/>
+          <p:nvPr/>
+        </p:nvSpPr>
+        <p:spPr>
+          <a:xfrm>
+            <a:off x="4370832" y="1344168"/>
+            <a:ext cx="64008" cy="3474720"/>
+          </a:xfrm>
+          <a:prstGeom prst="rect">
+            <a:avLst/>
+          </a:prstGeom>
+          <a:solidFill>
+            <a:srgbClr val="C8752D"/>
+          </a:solidFill>
+          <a:ln>
+            <a:noFill/>
+          </a:ln>
+        </p:spPr>
+        <p:style>
+          <a:lnRef idx="1">
+            <a:schemeClr val="accent1"/>
+          </a:lnRef>
+          <a:fillRef idx="3">
+            <a:schemeClr val="accent1"/>
+          </a:fillRef>
+          <a:effectRef idx="2">
+            <a:schemeClr val="accent1"/>
+          </a:effectRef>
+          <a:fontRef idx="minor">
+            <a:schemeClr val="lt1"/>
+          </a:fontRef>
+        </p:style>
+        <p:txBody>
+          <a:bodyPr rtlCol="0" anchor="ctr"/>
+          <a:lstStyle/>
+          <a:p>
+            <a:pPr algn="ctr"/>
+          </a:p>
+        </p:txBody>
+      </p:sp>
+      <p:sp>
+        <p:nvSpPr>
+          <p:cNvPr id="14" name="TextBox 13"/>
+          <p:cNvSpPr txBox="1"/>
+          <p:nvPr/>
+        </p:nvSpPr>
+        <p:spPr>
+          <a:xfrm>
+            <a:off x="4535424" y="1444752"/>
+            <a:ext cx="3127248" cy="310896"/>
+          </a:xfrm>
+          <a:prstGeom prst="rect">
+            <a:avLst/>
+          </a:prstGeom>
+          <a:noFill/>
+        </p:spPr>
+        <p:txBody>
+          <a:bodyPr wrap="square" lIns="45720" rIns="45720" tIns="27432" bIns="18288">
+            <a:spAutoFit/>
+          </a:bodyPr>
+          <a:lstStyle/>
+          <a:p>
+            <a:pPr algn="l">
+              <a:defRPr sz="1600" b="1">
+                <a:solidFill>
+                  <a:srgbClr val="16324F"/>
+                </a:solidFill>
+                <a:latin typeface="Aptos"/>
+              </a:defRPr>
+            </a:pPr>
+            <a:r>
+              <a:t>Not verified / missing</a:t>
+            </a:r>
+          </a:p>
+        </p:txBody>
+      </p:sp>
+      <p:sp>
+        <p:nvSpPr>
+          <p:cNvPr id="15" name="TextBox 14"/>
+          <p:cNvSpPr txBox="1"/>
+          <p:nvPr/>
+        </p:nvSpPr>
+        <p:spPr>
+          <a:xfrm>
+            <a:off x="4535424" y="1801368"/>
+            <a:ext cx="3118104" cy="2953512"/>
+          </a:xfrm>
+          <a:prstGeom prst="rect">
+            <a:avLst/>
+          </a:prstGeom>
+          <a:noFill/>
+        </p:spPr>
+        <p:txBody>
+          <a:bodyPr wrap="square" lIns="45720" rIns="45720" tIns="27432" bIns="18288">
+            <a:spAutoFit/>
+          </a:bodyPr>
+          <a:lstStyle/>
+          <a:p>
+            <a:pPr algn="l">
+              <a:defRPr sz="1200" b="0">
+                <a:solidFill>
+                  <a:srgbClr val="233746"/>
+                </a:solidFill>
+                <a:latin typeface="Aptos"/>
+              </a:defRPr>
+            </a:pPr>
+            <a:r>
+              <a:t>No production service principal or non-dev target evidenced</a:t>
+            </a:r>
+            <a:br/>
+            <a:br/>
+            <a:r>
+              <a:t>No CI workflow in repository</a:t>
+            </a:r>
+            <a:br/>
+            <a:br/>
+            <a:r>
+              <a:t>No automated failure notification</a:t>
+            </a:r>
+            <a:br/>
+            <a:br/>
+            <a:r>
+              <a:t>Retention, RTO/RPO, support SLA not approved</a:t>
+            </a:r>
+            <a:br/>
+            <a:br/>
+            <a:r>
+              <a:t>Schedule PAUSED; no go-live approval</a:t>
+            </a:r>
+          </a:p>
+        </p:txBody>
+      </p:sp>
+      <p:sp>
+        <p:nvSpPr>
+          <p:cNvPr id="16" name="Rounded Rectangle 15"/>
+          <p:cNvSpPr/>
+          <p:nvPr/>
+        </p:nvSpPr>
+        <p:spPr>
+          <a:xfrm>
+            <a:off x="8138160" y="1344168"/>
+            <a:ext cx="3401568" cy="3474720"/>
+          </a:xfrm>
+          <a:prstGeom prst="roundRect">
+            <a:avLst>
+              <a:gd name="adj" fmla="val 8000"/>
+            </a:avLst>
+          </a:prstGeom>
+          <a:solidFill>
+            <a:srgbClr val="EFF4F6"/>
+          </a:solidFill>
+          <a:ln w="10160">
+            <a:solidFill>
+              <a:srgbClr val="D7E0E5"/>
+            </a:solidFill>
+          </a:ln>
+        </p:spPr>
+        <p:style>
+          <a:lnRef idx="1">
+            <a:schemeClr val="accent1"/>
+          </a:lnRef>
+          <a:fillRef idx="3">
+            <a:schemeClr val="accent1"/>
+          </a:fillRef>
+          <a:effectRef idx="2">
+            <a:schemeClr val="accent1"/>
+          </a:effectRef>
+          <a:fontRef idx="minor">
+            <a:schemeClr val="lt1"/>
+          </a:fontRef>
+        </p:style>
+        <p:txBody>
+          <a:bodyPr rtlCol="0" anchor="ctr"/>
+          <a:lstStyle/>
+          <a:p>
+            <a:pPr algn="ctr"/>
+          </a:p>
+        </p:txBody>
+      </p:sp>
+      <p:sp>
+        <p:nvSpPr>
+          <p:cNvPr id="17" name="Rectangle 16"/>
+          <p:cNvSpPr/>
+          <p:nvPr/>
+        </p:nvSpPr>
+        <p:spPr>
+          <a:xfrm>
+            <a:off x="8138160" y="1344168"/>
+            <a:ext cx="64008" cy="3474720"/>
+          </a:xfrm>
+          <a:prstGeom prst="rect">
+            <a:avLst/>
+          </a:prstGeom>
+          <a:solidFill>
+            <a:srgbClr val="2C6E9B"/>
+          </a:solidFill>
+          <a:ln>
+            <a:noFill/>
+          </a:ln>
+        </p:spPr>
+        <p:style>
+          <a:lnRef idx="1">
+            <a:schemeClr val="accent1"/>
+          </a:lnRef>
+          <a:fillRef idx="3">
+            <a:schemeClr val="accent1"/>
+          </a:fillRef>
+          <a:effectRef idx="2">
+            <a:schemeClr val="accent1"/>
+          </a:effectRef>
+          <a:fontRef idx="minor">
+            <a:schemeClr val="lt1"/>
+          </a:fontRef>
+        </p:style>
+        <p:txBody>
+          <a:bodyPr rtlCol="0" anchor="ctr"/>
+          <a:lstStyle/>
+          <a:p>
+            <a:pPr algn="ctr"/>
+          </a:p>
+        </p:txBody>
+      </p:sp>
+      <p:sp>
+        <p:nvSpPr>
+          <p:cNvPr id="18" name="TextBox 17"/>
+          <p:cNvSpPr txBox="1"/>
+          <p:nvPr/>
+        </p:nvSpPr>
+        <p:spPr>
+          <a:xfrm>
+            <a:off x="8302752" y="1444752"/>
+            <a:ext cx="3127248" cy="310896"/>
+          </a:xfrm>
+          <a:prstGeom prst="rect">
+            <a:avLst/>
+          </a:prstGeom>
+          <a:noFill/>
+        </p:spPr>
+        <p:txBody>
+          <a:bodyPr wrap="square" lIns="45720" rIns="45720" tIns="27432" bIns="18288">
+            <a:spAutoFit/>
+          </a:bodyPr>
+          <a:lstStyle/>
+          <a:p>
+            <a:pPr algn="l">
+              <a:defRPr sz="1600" b="1">
+                <a:solidFill>
+                  <a:srgbClr val="16324F"/>
+                </a:solidFill>
+                <a:latin typeface="Aptos"/>
+              </a:defRPr>
+            </a:pPr>
+            <a:r>
+              <a:t>Readiness decision</a:t>
+            </a:r>
+          </a:p>
+        </p:txBody>
+      </p:sp>
+      <p:sp>
+        <p:nvSpPr>
+          <p:cNvPr id="19" name="TextBox 18"/>
+          <p:cNvSpPr txBox="1"/>
+          <p:nvPr/>
+        </p:nvSpPr>
+        <p:spPr>
+          <a:xfrm>
+            <a:off x="8302752" y="1801368"/>
+            <a:ext cx="3118104" cy="2953512"/>
+          </a:xfrm>
+          <a:prstGeom prst="rect">
+            <a:avLst/>
+          </a:prstGeom>
+          <a:noFill/>
+        </p:spPr>
+        <p:txBody>
+          <a:bodyPr wrap="square" lIns="45720" rIns="45720" tIns="27432" bIns="18288">
+            <a:spAutoFit/>
+          </a:bodyPr>
+          <a:lstStyle/>
+          <a:p>
+            <a:pPr algn="l">
+              <a:defRPr sz="1200" b="0">
+                <a:solidFill>
+                  <a:srgbClr val="233746"/>
+                </a:solidFill>
+                <a:latin typeface="Aptos"/>
+              </a:defRPr>
+            </a:pPr>
+            <a:r>
+              <a:t>Confirm data classification and access</a:t>
+            </a:r>
+            <a:br/>
+            <a:br/>
+            <a:r>
+              <a:t>Review least privilege and secrets</a:t>
+            </a:r>
+            <a:br/>
+            <a:br/>
+            <a:r>
+              <a:t>Test alerts, rerun, recovery and rollback</a:t>
+            </a:r>
+            <a:br/>
+            <a:br/>
+            <a:r>
+              <a:t>Approve owner, retention and support process</a:t>
+            </a:r>
+            <a:br/>
+            <a:br/>
+            <a:r>
+              <a:t>Explicit no-go if any critical control is open</a:t>
+            </a:r>
+          </a:p>
+        </p:txBody>
+      </p:sp>
+      <p:sp>
+        <p:nvSpPr>
+          <p:cNvPr id="20" name="TextBox 19"/>
+          <p:cNvSpPr txBox="1"/>
+          <p:nvPr/>
+        </p:nvSpPr>
+        <p:spPr>
+          <a:xfrm>
+            <a:off x="749808" y="5193792"/>
+            <a:ext cx="10607040" cy="530352"/>
+          </a:xfrm>
+          <a:prstGeom prst="rect">
+            <a:avLst/>
+          </a:prstGeom>
+          <a:noFill/>
+        </p:spPr>
+        <p:txBody>
+          <a:bodyPr wrap="square" lIns="45720" rIns="45720" tIns="27432" bIns="18288">
+            <a:spAutoFit/>
+          </a:bodyPr>
+          <a:lstStyle/>
+          <a:p>
+            <a:pPr algn="l">
+              <a:defRPr sz="1200" b="0">
+                <a:solidFill>
+                  <a:srgbClr val="647786"/>
+                </a:solidFill>
+                <a:latin typeface="Aptos"/>
+              </a:defRPr>
+            </a:pPr>
+            <a:r>
+              <a:t>GitHub/CI is a proposed delivery control in this plan; the checked-in repository currently shows the Databricks Asset Bundle and deploy script, not a CI workflow.</a:t>
+            </a:r>
+          </a:p>
+        </p:txBody>
+      </p:sp>
+    </p:spTree>
+  </p:cSld>
+  <p:clrMapOvr>
+    <a:masterClrMapping/>
+  </p:clrMapOvr>
+</p:sld>
+</file>
+
 <file path=ppt/slides/slide2.xml><?xml version="1.0" encoding="utf-8"?>
 <p:sld xmlns:a="http://schemas.openxmlformats.org/drawingml/2006/main" xmlns:p="http://schemas.openxmlformats.org/presentationml/2006/main" xmlns:r="http://schemas.openxmlformats.org/officeDocument/2006/relationships">
   <p:cSld>
@@ -12675,6 +15453,662 @@
             </a:pPr>
             <a:r>
               <a:t>Existing scripts/deploy.sh uses Databricks CLI and the Bundle. No production Bundle target or promotion pipeline is present; all future deployment architecture is proposed.</a:t>
+            </a:r>
+          </a:p>
+        </p:txBody>
+      </p:sp>
+    </p:spTree>
+  </p:cSld>
+  <p:clrMapOvr>
+    <a:masterClrMapping/>
+  </p:clrMapOvr>
+</p:sld>
+</file>
+
+<file path=ppt/slides/slide9.xml><?xml version="1.0" encoding="utf-8"?>
+<p:sld xmlns:a="http://schemas.openxmlformats.org/drawingml/2006/main" xmlns:p="http://schemas.openxmlformats.org/presentationml/2006/main" xmlns:r="http://schemas.openxmlformats.org/officeDocument/2006/relationships">
+  <p:cSld>
+    <p:bg>
+      <p:bgPr>
+        <a:solidFill>
+          <a:srgbClr val="FFFFFF"/>
+        </a:solidFill>
+        <a:effectLst/>
+      </p:bgPr>
+    </p:bg>
+    <p:spTree>
+      <p:nvGrpSpPr>
+        <p:cNvPr id="1" name=""/>
+        <p:cNvGrpSpPr/>
+        <p:nvPr/>
+      </p:nvGrpSpPr>
+      <p:grpSpPr/>
+      <p:sp>
+        <p:nvSpPr>
+          <p:cNvPr id="2" name="Rectangle 1"/>
+          <p:cNvSpPr/>
+          <p:nvPr/>
+        </p:nvSpPr>
+        <p:spPr>
+          <a:xfrm>
+            <a:off x="0" y="0"/>
+            <a:ext cx="12191695" cy="109728"/>
+          </a:xfrm>
+          <a:prstGeom prst="rect">
+            <a:avLst/>
+          </a:prstGeom>
+          <a:solidFill>
+            <a:srgbClr val="007C78"/>
+          </a:solidFill>
+          <a:ln>
+            <a:noFill/>
+          </a:ln>
+        </p:spPr>
+        <p:style>
+          <a:lnRef idx="1">
+            <a:schemeClr val="accent1"/>
+          </a:lnRef>
+          <a:fillRef idx="3">
+            <a:schemeClr val="accent1"/>
+          </a:fillRef>
+          <a:effectRef idx="2">
+            <a:schemeClr val="accent1"/>
+          </a:effectRef>
+          <a:fontRef idx="minor">
+            <a:schemeClr val="lt1"/>
+          </a:fontRef>
+        </p:style>
+        <p:txBody>
+          <a:bodyPr rtlCol="0" anchor="ctr"/>
+          <a:lstStyle/>
+          <a:p>
+            <a:pPr algn="ctr"/>
+          </a:p>
+        </p:txBody>
+      </p:sp>
+      <p:sp>
+        <p:nvSpPr>
+          <p:cNvPr id="3" name="TextBox 2"/>
+          <p:cNvSpPr txBox="1"/>
+          <p:nvPr/>
+        </p:nvSpPr>
+        <p:spPr>
+          <a:xfrm>
+            <a:off x="502920" y="283464"/>
+            <a:ext cx="10789920" cy="502920"/>
+          </a:xfrm>
+          <a:prstGeom prst="rect">
+            <a:avLst/>
+          </a:prstGeom>
+          <a:noFill/>
+        </p:spPr>
+        <p:txBody>
+          <a:bodyPr wrap="square" lIns="45720" rIns="45720" tIns="27432" bIns="18288">
+            <a:spAutoFit/>
+          </a:bodyPr>
+          <a:lstStyle/>
+          <a:p>
+            <a:pPr algn="l">
+              <a:defRPr sz="2500" b="1">
+                <a:solidFill>
+                  <a:srgbClr val="16324F"/>
+                </a:solidFill>
+                <a:latin typeface="Aptos Display"/>
+              </a:defRPr>
+            </a:pPr>
+            <a:r>
+              <a:t>Current prototype and proposed target state</a:t>
+            </a:r>
+          </a:p>
+        </p:txBody>
+      </p:sp>
+      <p:sp>
+        <p:nvSpPr>
+          <p:cNvPr id="4" name="TextBox 3"/>
+          <p:cNvSpPr txBox="1"/>
+          <p:nvPr/>
+        </p:nvSpPr>
+        <p:spPr>
+          <a:xfrm>
+            <a:off x="530352" y="804672"/>
+            <a:ext cx="10972800" cy="256032"/>
+          </a:xfrm>
+          <a:prstGeom prst="rect">
+            <a:avLst/>
+          </a:prstGeom>
+          <a:noFill/>
+        </p:spPr>
+        <p:txBody>
+          <a:bodyPr wrap="square" lIns="45720" rIns="45720" tIns="27432" bIns="18288">
+            <a:spAutoFit/>
+          </a:bodyPr>
+          <a:lstStyle/>
+          <a:p>
+            <a:pPr algn="l">
+              <a:defRPr sz="900" b="1">
+                <a:solidFill>
+                  <a:srgbClr val="007C78"/>
+                </a:solidFill>
+                <a:latin typeface="Aptos"/>
+              </a:defRPr>
+            </a:pPr>
+            <a:r>
+              <a:t>08 | CURRENT AND TARGET</a:t>
+            </a:r>
+          </a:p>
+        </p:txBody>
+      </p:sp>
+      <p:sp>
+        <p:nvSpPr>
+          <p:cNvPr id="5" name="Rectangle 4"/>
+          <p:cNvSpPr/>
+          <p:nvPr/>
+        </p:nvSpPr>
+        <p:spPr>
+          <a:xfrm>
+            <a:off x="502920" y="6510528"/>
+            <a:ext cx="11173968" cy="10972"/>
+          </a:xfrm>
+          <a:prstGeom prst="rect">
+            <a:avLst/>
+          </a:prstGeom>
+          <a:solidFill>
+            <a:srgbClr val="D7E0E5"/>
+          </a:solidFill>
+          <a:ln>
+            <a:noFill/>
+          </a:ln>
+        </p:spPr>
+        <p:style>
+          <a:lnRef idx="1">
+            <a:schemeClr val="accent1"/>
+          </a:lnRef>
+          <a:fillRef idx="3">
+            <a:schemeClr val="accent1"/>
+          </a:fillRef>
+          <a:effectRef idx="2">
+            <a:schemeClr val="accent1"/>
+          </a:effectRef>
+          <a:fontRef idx="minor">
+            <a:schemeClr val="lt1"/>
+          </a:fontRef>
+        </p:style>
+        <p:txBody>
+          <a:bodyPr rtlCol="0" anchor="ctr"/>
+          <a:lstStyle/>
+          <a:p>
+            <a:pPr algn="ctr"/>
+          </a:p>
+        </p:txBody>
+      </p:sp>
+      <p:sp>
+        <p:nvSpPr>
+          <p:cNvPr id="6" name="TextBox 5"/>
+          <p:cNvSpPr txBox="1"/>
+          <p:nvPr/>
+        </p:nvSpPr>
+        <p:spPr>
+          <a:xfrm>
+            <a:off x="530352" y="6556248"/>
+            <a:ext cx="9601200" cy="164592"/>
+          </a:xfrm>
+          <a:prstGeom prst="rect">
+            <a:avLst/>
+          </a:prstGeom>
+          <a:noFill/>
+        </p:spPr>
+        <p:txBody>
+          <a:bodyPr wrap="square" lIns="45720" rIns="45720" tIns="27432" bIns="18288">
+            <a:spAutoFit/>
+          </a:bodyPr>
+          <a:lstStyle/>
+          <a:p>
+            <a:pPr algn="l">
+              <a:defRPr sz="800" b="0">
+                <a:solidFill>
+                  <a:srgbClr val="647786"/>
+                </a:solidFill>
+                <a:latin typeface="Aptos"/>
+              </a:defRPr>
+            </a:pPr>
+            <a:r>
+              <a:t>TRADING PLATFORM  |  EVIDENCE BASELINE 2026-10-14  |  PROPOSED DELIVERY PLAN</a:t>
+            </a:r>
+          </a:p>
+        </p:txBody>
+      </p:sp>
+      <p:sp>
+        <p:nvSpPr>
+          <p:cNvPr id="7" name="TextBox 6"/>
+          <p:cNvSpPr txBox="1"/>
+          <p:nvPr/>
+        </p:nvSpPr>
+        <p:spPr>
+          <a:xfrm>
+            <a:off x="11109960" y="6537960"/>
+            <a:ext cx="502920" cy="182880"/>
+          </a:xfrm>
+          <a:prstGeom prst="rect">
+            <a:avLst/>
+          </a:prstGeom>
+          <a:noFill/>
+        </p:spPr>
+        <p:txBody>
+          <a:bodyPr wrap="square" lIns="45720" rIns="45720" tIns="27432" bIns="18288">
+            <a:spAutoFit/>
+          </a:bodyPr>
+          <a:lstStyle/>
+          <a:p>
+            <a:pPr algn="r">
+              <a:defRPr sz="900" b="1">
+                <a:solidFill>
+                  <a:srgbClr val="647786"/>
+                </a:solidFill>
+                <a:latin typeface="Aptos"/>
+              </a:defRPr>
+            </a:pPr>
+            <a:r>
+              <a:t>09</a:t>
+            </a:r>
+          </a:p>
+        </p:txBody>
+      </p:sp>
+      <p:sp>
+        <p:nvSpPr>
+          <p:cNvPr id="8" name="Rounded Rectangle 7"/>
+          <p:cNvSpPr/>
+          <p:nvPr/>
+        </p:nvSpPr>
+        <p:spPr>
+          <a:xfrm>
+            <a:off x="594360" y="1344168"/>
+            <a:ext cx="5321808" cy="3611880"/>
+          </a:xfrm>
+          <a:prstGeom prst="roundRect">
+            <a:avLst>
+              <a:gd name="adj" fmla="val 8000"/>
+            </a:avLst>
+          </a:prstGeom>
+          <a:solidFill>
+            <a:srgbClr val="EAF3F1"/>
+          </a:solidFill>
+          <a:ln w="10160">
+            <a:solidFill>
+              <a:srgbClr val="D7E0E5"/>
+            </a:solidFill>
+          </a:ln>
+        </p:spPr>
+        <p:style>
+          <a:lnRef idx="1">
+            <a:schemeClr val="accent1"/>
+          </a:lnRef>
+          <a:fillRef idx="3">
+            <a:schemeClr val="accent1"/>
+          </a:fillRef>
+          <a:effectRef idx="2">
+            <a:schemeClr val="accent1"/>
+          </a:effectRef>
+          <a:fontRef idx="minor">
+            <a:schemeClr val="lt1"/>
+          </a:fontRef>
+        </p:style>
+        <p:txBody>
+          <a:bodyPr rtlCol="0" anchor="ctr"/>
+          <a:lstStyle/>
+          <a:p>
+            <a:pPr algn="ctr"/>
+          </a:p>
+        </p:txBody>
+      </p:sp>
+      <p:sp>
+        <p:nvSpPr>
+          <p:cNvPr id="9" name="Rectangle 8"/>
+          <p:cNvSpPr/>
+          <p:nvPr/>
+        </p:nvSpPr>
+        <p:spPr>
+          <a:xfrm>
+            <a:off x="594360" y="1344168"/>
+            <a:ext cx="64008" cy="3611880"/>
+          </a:xfrm>
+          <a:prstGeom prst="rect">
+            <a:avLst/>
+          </a:prstGeom>
+          <a:solidFill>
+            <a:srgbClr val="007C78"/>
+          </a:solidFill>
+          <a:ln>
+            <a:noFill/>
+          </a:ln>
+        </p:spPr>
+        <p:style>
+          <a:lnRef idx="1">
+            <a:schemeClr val="accent1"/>
+          </a:lnRef>
+          <a:fillRef idx="3">
+            <a:schemeClr val="accent1"/>
+          </a:fillRef>
+          <a:effectRef idx="2">
+            <a:schemeClr val="accent1"/>
+          </a:effectRef>
+          <a:fontRef idx="minor">
+            <a:schemeClr val="lt1"/>
+          </a:fontRef>
+        </p:style>
+        <p:txBody>
+          <a:bodyPr rtlCol="0" anchor="ctr"/>
+          <a:lstStyle/>
+          <a:p>
+            <a:pPr algn="ctr"/>
+          </a:p>
+        </p:txBody>
+      </p:sp>
+      <p:sp>
+        <p:nvSpPr>
+          <p:cNvPr id="10" name="TextBox 9"/>
+          <p:cNvSpPr txBox="1"/>
+          <p:nvPr/>
+        </p:nvSpPr>
+        <p:spPr>
+          <a:xfrm>
+            <a:off x="758952" y="1444752"/>
+            <a:ext cx="5047488" cy="310896"/>
+          </a:xfrm>
+          <a:prstGeom prst="rect">
+            <a:avLst/>
+          </a:prstGeom>
+          <a:noFill/>
+        </p:spPr>
+        <p:txBody>
+          <a:bodyPr wrap="square" lIns="45720" rIns="45720" tIns="27432" bIns="18288">
+            <a:spAutoFit/>
+          </a:bodyPr>
+          <a:lstStyle/>
+          <a:p>
+            <a:pPr algn="l">
+              <a:defRPr sz="1700" b="1">
+                <a:solidFill>
+                  <a:srgbClr val="16324F"/>
+                </a:solidFill>
+                <a:latin typeface="Aptos"/>
+              </a:defRPr>
+            </a:pPr>
+            <a:r>
+              <a:t>Current | implemented prototype</a:t>
+            </a:r>
+          </a:p>
+        </p:txBody>
+      </p:sp>
+      <p:sp>
+        <p:nvSpPr>
+          <p:cNvPr id="11" name="TextBox 10"/>
+          <p:cNvSpPr txBox="1"/>
+          <p:nvPr/>
+        </p:nvSpPr>
+        <p:spPr>
+          <a:xfrm>
+            <a:off x="758952" y="1801368"/>
+            <a:ext cx="5038344" cy="3090672"/>
+          </a:xfrm>
+          <a:prstGeom prst="rect">
+            <a:avLst/>
+          </a:prstGeom>
+          <a:noFill/>
+        </p:spPr>
+        <p:txBody>
+          <a:bodyPr wrap="square" lIns="45720" rIns="45720" tIns="27432" bIns="18288">
+            <a:spAutoFit/>
+          </a:bodyPr>
+          <a:lstStyle/>
+          <a:p>
+            <a:pPr algn="l">
+              <a:defRPr sz="1300" b="0">
+                <a:solidFill>
+                  <a:srgbClr val="233746"/>
+                </a:solidFill>
+                <a:latin typeface="Aptos"/>
+              </a:defRPr>
+            </a:pPr>
+            <a:r>
+              <a:t>Synthetic 14-field trade snapshot and Yahoo Finance closes</a:t>
+            </a:r>
+            <a:br/>
+            <a:br/>
+            <a:r>
+              <a:t>Unity Catalog cibc: Bronze / Silver / Gold</a:t>
+            </a:r>
+            <a:br/>
+            <a:br/>
+            <a:r>
+              <a:t>Six-task serverless Databricks Job; Python wheel; dev Bundle target</a:t>
+            </a:r>
+            <a:br/>
+            <a:br/>
+            <a:r>
+              <a:t>Audit, rejects, run-level valuation breaks; notebooks and SQL</a:t>
+            </a:r>
+            <a:br/>
+            <a:br/>
+            <a:r>
+              <a:t>Schedule PAUSED; 10 configured instruments; USD cash equities</a:t>
+            </a:r>
+          </a:p>
+        </p:txBody>
+      </p:sp>
+      <p:sp>
+        <p:nvSpPr>
+          <p:cNvPr id="12" name="Rounded Rectangle 11"/>
+          <p:cNvSpPr/>
+          <p:nvPr/>
+        </p:nvSpPr>
+        <p:spPr>
+          <a:xfrm>
+            <a:off x="6272784" y="1344168"/>
+            <a:ext cx="5321808" cy="3611880"/>
+          </a:xfrm>
+          <a:prstGeom prst="roundRect">
+            <a:avLst>
+              <a:gd name="adj" fmla="val 8000"/>
+            </a:avLst>
+          </a:prstGeom>
+          <a:solidFill>
+            <a:srgbClr val="FAF0E5"/>
+          </a:solidFill>
+          <a:ln w="10160">
+            <a:solidFill>
+              <a:srgbClr val="D7E0E5"/>
+            </a:solidFill>
+          </a:ln>
+        </p:spPr>
+        <p:style>
+          <a:lnRef idx="1">
+            <a:schemeClr val="accent1"/>
+          </a:lnRef>
+          <a:fillRef idx="3">
+            <a:schemeClr val="accent1"/>
+          </a:fillRef>
+          <a:effectRef idx="2">
+            <a:schemeClr val="accent1"/>
+          </a:effectRef>
+          <a:fontRef idx="minor">
+            <a:schemeClr val="lt1"/>
+          </a:fontRef>
+        </p:style>
+        <p:txBody>
+          <a:bodyPr rtlCol="0" anchor="ctr"/>
+          <a:lstStyle/>
+          <a:p>
+            <a:pPr algn="ctr"/>
+          </a:p>
+        </p:txBody>
+      </p:sp>
+      <p:sp>
+        <p:nvSpPr>
+          <p:cNvPr id="13" name="Rectangle 12"/>
+          <p:cNvSpPr/>
+          <p:nvPr/>
+        </p:nvSpPr>
+        <p:spPr>
+          <a:xfrm>
+            <a:off x="6272784" y="1344168"/>
+            <a:ext cx="64008" cy="3611880"/>
+          </a:xfrm>
+          <a:prstGeom prst="rect">
+            <a:avLst/>
+          </a:prstGeom>
+          <a:solidFill>
+            <a:srgbClr val="C8752D"/>
+          </a:solidFill>
+          <a:ln>
+            <a:noFill/>
+          </a:ln>
+        </p:spPr>
+        <p:style>
+          <a:lnRef idx="1">
+            <a:schemeClr val="accent1"/>
+          </a:lnRef>
+          <a:fillRef idx="3">
+            <a:schemeClr val="accent1"/>
+          </a:fillRef>
+          <a:effectRef idx="2">
+            <a:schemeClr val="accent1"/>
+          </a:effectRef>
+          <a:fontRef idx="minor">
+            <a:schemeClr val="lt1"/>
+          </a:fontRef>
+        </p:style>
+        <p:txBody>
+          <a:bodyPr rtlCol="0" anchor="ctr"/>
+          <a:lstStyle/>
+          <a:p>
+            <a:pPr algn="ctr"/>
+          </a:p>
+        </p:txBody>
+      </p:sp>
+      <p:sp>
+        <p:nvSpPr>
+          <p:cNvPr id="14" name="TextBox 13"/>
+          <p:cNvSpPr txBox="1"/>
+          <p:nvPr/>
+        </p:nvSpPr>
+        <p:spPr>
+          <a:xfrm>
+            <a:off x="6437376" y="1444752"/>
+            <a:ext cx="5047488" cy="310896"/>
+          </a:xfrm>
+          <a:prstGeom prst="rect">
+            <a:avLst/>
+          </a:prstGeom>
+          <a:noFill/>
+        </p:spPr>
+        <p:txBody>
+          <a:bodyPr wrap="square" lIns="45720" rIns="45720" tIns="27432" bIns="18288">
+            <a:spAutoFit/>
+          </a:bodyPr>
+          <a:lstStyle/>
+          <a:p>
+            <a:pPr algn="l">
+              <a:defRPr sz="1700" b="1">
+                <a:solidFill>
+                  <a:srgbClr val="16324F"/>
+                </a:solidFill>
+                <a:latin typeface="Aptos"/>
+              </a:defRPr>
+            </a:pPr>
+            <a:r>
+              <a:t>Target | proposed, gated</a:t>
+            </a:r>
+          </a:p>
+        </p:txBody>
+      </p:sp>
+      <p:sp>
+        <p:nvSpPr>
+          <p:cNvPr id="15" name="TextBox 14"/>
+          <p:cNvSpPr txBox="1"/>
+          <p:nvPr/>
+        </p:nvSpPr>
+        <p:spPr>
+          <a:xfrm>
+            <a:off x="6437376" y="1801368"/>
+            <a:ext cx="5038344" cy="3090672"/>
+          </a:xfrm>
+          <a:prstGeom prst="rect">
+            <a:avLst/>
+          </a:prstGeom>
+          <a:noFill/>
+        </p:spPr>
+        <p:txBody>
+          <a:bodyPr wrap="square" lIns="45720" rIns="45720" tIns="27432" bIns="18288">
+            <a:spAutoFit/>
+          </a:bodyPr>
+          <a:lstStyle/>
+          <a:p>
+            <a:pPr algn="l">
+              <a:defRPr sz="1300" b="0">
+                <a:solidFill>
+                  <a:srgbClr val="233746"/>
+                </a:solidFill>
+                <a:latin typeface="Aptos"/>
+              </a:defRPr>
+            </a:pPr>
+            <a:r>
+              <a:t>Approved trade and licensed market-data contracts</a:t>
+            </a:r>
+            <a:br/>
+            <a:br/>
+            <a:r>
+              <a:t>Preserve the Medallion/Delta flow; add only approved reference data</a:t>
+            </a:r>
+            <a:br/>
+            <a:br/>
+            <a:r>
+              <a:t>Reviewed CI and promotion across provisioned environments</a:t>
+            </a:r>
+            <a:br/>
+            <a:br/>
+            <a:r>
+              <a:t>Least-privilege runtime identity, tested alerts and recovery</a:t>
+            </a:r>
+            <a:br/>
+            <a:br/>
+            <a:r>
+              <a:t>Business-approved dashboard, support ownership and retention policy</a:t>
+            </a:r>
+          </a:p>
+        </p:txBody>
+      </p:sp>
+      <p:sp>
+        <p:nvSpPr>
+          <p:cNvPr id="16" name="TextBox 15"/>
+          <p:cNvSpPr txBox="1"/>
+          <p:nvPr/>
+        </p:nvSpPr>
+        <p:spPr>
+          <a:xfrm>
+            <a:off x="749808" y="5349240"/>
+            <a:ext cx="10789920" cy="548640"/>
+          </a:xfrm>
+          <a:prstGeom prst="rect">
+            <a:avLst/>
+          </a:prstGeom>
+          <a:noFill/>
+        </p:spPr>
+        <p:txBody>
+          <a:bodyPr wrap="square" lIns="45720" rIns="45720" tIns="27432" bIns="18288">
+            <a:spAutoFit/>
+          </a:bodyPr>
+          <a:lstStyle/>
+          <a:p>
+            <a:pPr algn="l">
+              <a:defRPr sz="1300" b="1">
+                <a:solidFill>
+                  <a:srgbClr val="A94442"/>
+                </a:solidFill>
+                <a:latin typeface="Aptos"/>
+              </a:defRPr>
+            </a:pPr>
+            <a:r>
+              <a:t>Target-state components are backlog proposals, not provisioned controls. No new schema, data provider, BI platform, or CI service is assumed by this design.</a:t>
             </a:r>
           </a:p>
         </p:txBody>
@@ -13005,4 +16439,324 @@
   </a:objectDefaults>
   <a:extraClrSchemeLst/>
 </a:theme>
+</file>
+
+<file path=ppt/theme/theme2.xml><?xml version="1.0" encoding="utf-8"?>
+<a:theme xmlns:a="http://schemas.openxmlformats.org/drawingml/2006/main" name="Office Theme">
+  <a:themeElements>
+    <a:clrScheme name="Office">
+      <a:dk1>
+        <a:sysClr val="windowText" lastClr="000000"/>
+      </a:dk1>
+      <a:lt1>
+        <a:sysClr val="window" lastClr="FFFFFF"/>
+      </a:lt1>
+      <a:dk2>
+        <a:srgbClr val="1F497D"/>
+      </a:dk2>
+      <a:lt2>
+        <a:srgbClr val="EEECE1"/>
+      </a:lt2>
+      <a:accent1>
+        <a:srgbClr val="4F81BD"/>
+      </a:accent1>
+      <a:accent2>
+        <a:srgbClr val="C0504D"/>
+      </a:accent2>
+      <a:accent3>
+        <a:srgbClr val="9BBB59"/>
+      </a:accent3>
+      <a:accent4>
+        <a:srgbClr val="8064A2"/>
+      </a:accent4>
+      <a:accent5>
+        <a:srgbClr val="4BACC6"/>
+      </a:accent5>
+      <a:accent6>
+        <a:srgbClr val="F79646"/>
+      </a:accent6>
+      <a:hlink>
+        <a:srgbClr val="0000FF"/>
+      </a:hlink>
+      <a:folHlink>
+        <a:srgbClr val="800080"/>
+      </a:folHlink>
+    </a:clrScheme>
+    <a:fontScheme name="Office">
+      <a:majorFont>
+        <a:latin typeface="Calibri"/>
+        <a:ea typeface=""/>
+        <a:cs typeface=""/>
+        <a:font script="Jpan" typeface="ＭＳ Ｐゴシック"/>
+        <a:font script="Hang" typeface="맑은 고딕"/>
+        <a:font script="Hans" typeface="宋体"/>
+        <a:font script="Hant" typeface="新細明體"/>
+        <a:font script="Arab" typeface="Times New Roman"/>
+        <a:font script="Hebr" typeface="Times New Roman"/>
+        <a:font script="Thai" typeface="Angsana New"/>
+        <a:font script="Ethi" typeface="Nyala"/>
+        <a:font script="Beng" typeface="Vrinda"/>
+        <a:font script="Gujr" typeface="Shruti"/>
+        <a:font script="Khmr" typeface="MoolBoran"/>
+        <a:font script="Knda" typeface="Tunga"/>
+        <a:font script="Guru" typeface="Raavi"/>
+        <a:font script="Cans" typeface="Euphemia"/>
+        <a:font script="Cher" typeface="Plantagenet Cherokee"/>
+        <a:font script="Yiii" typeface="Microsoft Yi Baiti"/>
+        <a:font script="Tibt" typeface="Microsoft Himalaya"/>
+        <a:font script="Thaa" typeface="MV Boli"/>
+        <a:font script="Deva" typeface="Mangal"/>
+        <a:font script="Telu" typeface="Gautami"/>
+        <a:font script="Taml" typeface="Latha"/>
+        <a:font script="Syrc" typeface="Estrangelo Edessa"/>
+        <a:font script="Orya" typeface="Kalinga"/>
+        <a:font script="Mlym" typeface="Kartika"/>
+        <a:font script="Laoo" typeface="DokChampa"/>
+        <a:font script="Sinh" typeface="Iskoola Pota"/>
+        <a:font script="Mong" typeface="Mongolian Baiti"/>
+        <a:font script="Viet" typeface="Times New Roman"/>
+        <a:font script="Uigh" typeface="Microsoft Uighur"/>
+        <a:font script="Geor" typeface="Sylfaen"/>
+      </a:majorFont>
+      <a:minorFont>
+        <a:latin typeface="Calibri"/>
+        <a:ea typeface=""/>
+        <a:cs typeface=""/>
+        <a:font script="Jpan" typeface="ＭＳ Ｐゴシック"/>
+        <a:font script="Hang" typeface="맑은 고딕"/>
+        <a:font script="Hans" typeface="宋体"/>
+        <a:font script="Hant" typeface="新細明體"/>
+        <a:font script="Arab" typeface="Arial"/>
+        <a:font script="Hebr" typeface="Arial"/>
+        <a:font script="Thai" typeface="Cordia New"/>
+        <a:font script="Ethi" typeface="Nyala"/>
+        <a:font script="Beng" typeface="Vrinda"/>
+        <a:font script="Gujr" typeface="Shruti"/>
+        <a:font script="Khmr" typeface="DaunPenh"/>
+        <a:font script="Knda" typeface="Tunga"/>
+        <a:font script="Guru" typeface="Raavi"/>
+        <a:font script="Cans" typeface="Euphemia"/>
+        <a:font script="Cher" typeface="Plantagenet Cherokee"/>
+        <a:font script="Yiii" typeface="Microsoft Yi Baiti"/>
+        <a:font script="Tibt" typeface="Microsoft Himalaya"/>
+        <a:font script="Thaa" typeface="MV Boli"/>
+        <a:font script="Deva" typeface="Mangal"/>
+        <a:font script="Telu" typeface="Gautami"/>
+        <a:font script="Taml" typeface="Latha"/>
+        <a:font script="Syrc" typeface="Estrangelo Edessa"/>
+        <a:font script="Orya" typeface="Kalinga"/>
+        <a:font script="Mlym" typeface="Kartika"/>
+        <a:font script="Laoo" typeface="DokChampa"/>
+        <a:font script="Sinh" typeface="Iskoola Pota"/>
+        <a:font script="Mong" typeface="Mongolian Baiti"/>
+        <a:font script="Viet" typeface="Arial"/>
+        <a:font script="Uigh" typeface="Microsoft Uighur"/>
+        <a:font script="Geor" typeface="Sylfaen"/>
+      </a:minorFont>
+    </a:fontScheme>
+    <a:fmtScheme name="Office">
+      <a:fillStyleLst>
+        <a:solidFill>
+          <a:schemeClr val="phClr"/>
+        </a:solidFill>
+        <a:gradFill rotWithShape="1">
+          <a:gsLst>
+            <a:gs pos="0">
+              <a:schemeClr val="phClr">
+                <a:tint val="50000"/>
+                <a:satMod val="300000"/>
+              </a:schemeClr>
+            </a:gs>
+            <a:gs pos="35000">
+              <a:schemeClr val="phClr">
+                <a:tint val="37000"/>
+                <a:satMod val="300000"/>
+              </a:schemeClr>
+            </a:gs>
+            <a:gs pos="100000">
+              <a:schemeClr val="phClr">
+                <a:tint val="15000"/>
+                <a:satMod val="350000"/>
+              </a:schemeClr>
+            </a:gs>
+          </a:gsLst>
+          <a:lin ang="16200000" scaled="1"/>
+        </a:gradFill>
+        <a:gradFill rotWithShape="1">
+          <a:gsLst>
+            <a:gs pos="0">
+              <a:schemeClr val="phClr">
+                <a:tint val="100000"/>
+                <a:shade val="100000"/>
+                <a:satMod val="130000"/>
+              </a:schemeClr>
+            </a:gs>
+            <a:gs pos="100000">
+              <a:schemeClr val="phClr">
+                <a:tint val="50000"/>
+                <a:shade val="100000"/>
+                <a:satMod val="350000"/>
+              </a:schemeClr>
+            </a:gs>
+          </a:gsLst>
+          <a:lin ang="16200000" scaled="0"/>
+        </a:gradFill>
+      </a:fillStyleLst>
+      <a:lnStyleLst>
+        <a:ln w="9525" cap="flat" cmpd="sng" algn="ctr">
+          <a:solidFill>
+            <a:schemeClr val="phClr">
+              <a:shade val="95000"/>
+              <a:satMod val="105000"/>
+            </a:schemeClr>
+          </a:solidFill>
+          <a:prstDash val="solid"/>
+        </a:ln>
+        <a:ln w="25400" cap="flat" cmpd="sng" algn="ctr">
+          <a:solidFill>
+            <a:schemeClr val="phClr"/>
+          </a:solidFill>
+          <a:prstDash val="solid"/>
+        </a:ln>
+        <a:ln w="38100" cap="flat" cmpd="sng" algn="ctr">
+          <a:solidFill>
+            <a:schemeClr val="phClr"/>
+          </a:solidFill>
+          <a:prstDash val="solid"/>
+        </a:ln>
+      </a:lnStyleLst>
+      <a:effectStyleLst>
+        <a:effectStyle>
+          <a:effectLst>
+            <a:outerShdw blurRad="40000" dist="20000" dir="5400000" rotWithShape="0">
+              <a:srgbClr val="000000">
+                <a:alpha val="38000"/>
+              </a:srgbClr>
+            </a:outerShdw>
+          </a:effectLst>
+        </a:effectStyle>
+        <a:effectStyle>
+          <a:effectLst>
+            <a:outerShdw blurRad="40000" dist="23000" dir="5400000" rotWithShape="0">
+              <a:srgbClr val="000000">
+                <a:alpha val="35000"/>
+              </a:srgbClr>
+            </a:outerShdw>
+          </a:effectLst>
+        </a:effectStyle>
+        <a:effectStyle>
+          <a:effectLst>
+            <a:outerShdw blurRad="40000" dist="23000" dir="5400000" rotWithShape="0">
+              <a:srgbClr val="000000">
+                <a:alpha val="35000"/>
+              </a:srgbClr>
+            </a:outerShdw>
+          </a:effectLst>
+          <a:scene3d>
+            <a:camera prst="orthographicFront">
+              <a:rot lat="0" lon="0" rev="0"/>
+            </a:camera>
+            <a:lightRig rig="threePt" dir="t">
+              <a:rot lat="0" lon="0" rev="1200000"/>
+            </a:lightRig>
+          </a:scene3d>
+          <a:sp3d>
+            <a:bevelT w="63500" h="25400"/>
+          </a:sp3d>
+        </a:effectStyle>
+      </a:effectStyleLst>
+      <a:bgFillStyleLst>
+        <a:solidFill>
+          <a:schemeClr val="phClr"/>
+        </a:solidFill>
+        <a:gradFill rotWithShape="1">
+          <a:gsLst>
+            <a:gs pos="0">
+              <a:schemeClr val="phClr">
+                <a:tint val="40000"/>
+                <a:satMod val="350000"/>
+              </a:schemeClr>
+            </a:gs>
+            <a:gs pos="40000">
+              <a:schemeClr val="phClr">
+                <a:tint val="45000"/>
+                <a:shade val="99000"/>
+                <a:satMod val="350000"/>
+              </a:schemeClr>
+            </a:gs>
+            <a:gs pos="100000">
+              <a:schemeClr val="phClr">
+                <a:shade val="20000"/>
+                <a:satMod val="255000"/>
+              </a:schemeClr>
+            </a:gs>
+          </a:gsLst>
+          <a:path path="circle">
+            <a:fillToRect l="50000" t="-80000" r="50000" b="180000"/>
+          </a:path>
+        </a:gradFill>
+        <a:gradFill rotWithShape="1">
+          <a:gsLst>
+            <a:gs pos="0">
+              <a:schemeClr val="phClr">
+                <a:tint val="80000"/>
+                <a:satMod val="300000"/>
+              </a:schemeClr>
+            </a:gs>
+            <a:gs pos="100000">
+              <a:schemeClr val="phClr">
+                <a:shade val="30000"/>
+                <a:satMod val="200000"/>
+              </a:schemeClr>
+            </a:gs>
+          </a:gsLst>
+          <a:path path="circle">
+            <a:fillToRect l="50000" t="50000" r="50000" b="50000"/>
+          </a:path>
+        </a:gradFill>
+      </a:bgFillStyleLst>
+    </a:fmtScheme>
+  </a:themeElements>
+  <a:objectDefaults>
+    <a:spDef>
+      <a:spPr/>
+      <a:bodyPr/>
+      <a:lstStyle/>
+      <a:style>
+        <a:lnRef idx="1">
+          <a:schemeClr val="accent1"/>
+        </a:lnRef>
+        <a:fillRef idx="3">
+          <a:schemeClr val="accent1"/>
+        </a:fillRef>
+        <a:effectRef idx="2">
+          <a:schemeClr val="accent1"/>
+        </a:effectRef>
+        <a:fontRef idx="minor">
+          <a:schemeClr val="lt1"/>
+        </a:fontRef>
+      </a:style>
+    </a:spDef>
+    <a:lnDef>
+      <a:spPr/>
+      <a:bodyPr/>
+      <a:lstStyle/>
+      <a:style>
+        <a:lnRef idx="2">
+          <a:schemeClr val="accent1"/>
+        </a:lnRef>
+        <a:fillRef idx="0">
+          <a:schemeClr val="accent1"/>
+        </a:fillRef>
+        <a:effectRef idx="1">
+          <a:schemeClr val="accent1"/>
+        </a:effectRef>
+        <a:fontRef idx="minor">
+          <a:schemeClr val="tx1"/>
+        </a:fontRef>
+      </a:style>
+    </a:lnDef>
+  </a:objectDefaults>
+  <a:extraClrSchemeLst/>
+</a:theme>
 </file>